--- a/downloads/templates/Template_Campaign_Concept_v1.pptx
+++ b/downloads/templates/Template_Campaign_Concept_v1.pptx
@@ -232,7 +232,7 @@
           <c:showBubbleSize val="0"/>
           <c:showLeaderLines val="0"/>
         </c:dLbls>
-        <c:gapWidth val="90"/>
+        <c:gapWidth val="100"/>
         <c:overlap val="0"/>
         <c:axId val="2094734554"/>
         <c:axId val="2094734552"/>
@@ -2183,7 +2183,7 @@
         </p:nvSpPr>
         <p:spPr>
           <a:xfrm>
-            <a:off x="457200" y="1234440"/>
+            <a:off x="685800" y="1325880"/>
             <a:ext cx="2286000" cy="365760"/>
           </a:xfrm>
           <a:prstGeom prst="roundRect">
@@ -2210,7 +2210,7 @@
         </p:nvSpPr>
         <p:spPr>
           <a:xfrm>
-            <a:off x="457200" y="1234440"/>
+            <a:off x="685800" y="1325880"/>
             <a:ext cx="2286000" cy="365760"/>
           </a:xfrm>
           <a:prstGeom prst="rect">
@@ -2249,8 +2249,8 @@
         </p:nvSpPr>
         <p:spPr>
           <a:xfrm>
-            <a:off x="457200" y="1783080"/>
-            <a:ext cx="10972800" cy="1463040"/>
+            <a:off x="685800" y="1874520"/>
+            <a:ext cx="10820095" cy="1371600"/>
           </a:xfrm>
           <a:prstGeom prst="rect">
             <a:avLst/>
@@ -2288,8 +2288,8 @@
         </p:nvSpPr>
         <p:spPr>
           <a:xfrm>
-            <a:off x="457200" y="3383280"/>
-            <a:ext cx="7863840" cy="914400"/>
+            <a:off x="685800" y="3429000"/>
+            <a:ext cx="7498080" cy="822960"/>
           </a:xfrm>
           <a:prstGeom prst="rect">
             <a:avLst/>
@@ -2313,7 +2313,7 @@
                 <a:ea typeface="Hanken Grotesk" pitchFamily="34" charset="-122"/>
                 <a:cs typeface="Hanken Grotesk" pitchFamily="34" charset="-120"/>
               </a:rPr>
-              <a:t>Labore et dolore magna aliqua ut enim ad minim veniam quis nostrud exercitation ullamco laboris nisi ut aliquip.</a:t>
+              <a:t>Labore et dolore magna aliqua ut enim ad minim veniam quis nostrud exercitation ullamco.</a:t>
             </a:r>
             <a:endParaRPr lang="en-US" sz="1800" dirty="0"/>
           </a:p>
@@ -2327,7 +2327,7 @@
         </p:nvSpPr>
         <p:spPr>
           <a:xfrm>
-            <a:off x="457200" y="4572000"/>
+            <a:off x="685800" y="4572000"/>
             <a:ext cx="7315200" cy="320040"/>
           </a:xfrm>
           <a:prstGeom prst="rect">
@@ -2366,7 +2366,7 @@
         </p:nvSpPr>
         <p:spPr>
           <a:xfrm>
-            <a:off x="457200" y="5989320"/>
+            <a:off x="685800" y="5943600"/>
             <a:ext cx="7315200" cy="320040"/>
           </a:xfrm>
           <a:prstGeom prst="rect">
@@ -2437,8 +2437,8 @@
         </p:nvSpPr>
         <p:spPr>
           <a:xfrm>
-            <a:off x="457200" y="384048"/>
-            <a:ext cx="8961120" cy="274320"/>
+            <a:off x="685800" y="502920"/>
+            <a:ext cx="8595360" cy="274320"/>
           </a:xfrm>
           <a:prstGeom prst="rect">
             <a:avLst/>
@@ -2476,8 +2476,8 @@
         </p:nvSpPr>
         <p:spPr>
           <a:xfrm>
-            <a:off x="457200" y="676656"/>
-            <a:ext cx="11274552" cy="868680"/>
+            <a:off x="685800" y="804672"/>
+            <a:ext cx="10820095" cy="566928"/>
           </a:xfrm>
           <a:prstGeom prst="rect">
             <a:avLst/>
@@ -2496,7 +2496,7 @@
               <a:buNone/>
             </a:pPr>
             <a:r>
-              <a:rPr lang="en-US" sz="3000" b="1" dirty="0">
+              <a:rPr lang="en-US" sz="2800" b="1" dirty="0">
                 <a:solidFill>
                   <a:srgbClr val="222731"/>
                 </a:solidFill>
@@ -2504,9 +2504,9 @@
                 <a:ea typeface="Bricolage Grotesque" pitchFamily="34" charset="-122"/>
                 <a:cs typeface="Bricolage Grotesque" pitchFamily="34" charset="-120"/>
               </a:rPr>
-              <a:t>Sint occaecat cupidatat non proident sunt in culpa qui officia</a:t>
-            </a:r>
-            <a:endParaRPr lang="en-US" sz="3000" dirty="0"/>
+              <a:t>Sint occaecat cupidatat non proident sunt in</a:t>
+            </a:r>
+            <a:endParaRPr lang="en-US" sz="2800" dirty="0"/>
           </a:p>
         </p:txBody>
       </p:sp>
@@ -2518,7 +2518,7 @@
         </p:nvSpPr>
         <p:spPr>
           <a:xfrm>
-            <a:off x="457200" y="6400800"/>
+            <a:off x="685800" y="6400800"/>
             <a:ext cx="4389120" cy="256032"/>
           </a:xfrm>
           <a:prstGeom prst="rect">
@@ -2558,7 +2558,7 @@
         <p:spPr>
           <a:xfrm>
             <a:off x="4937760" y="6400800"/>
-            <a:ext cx="5943600" cy="256032"/>
+            <a:ext cx="5790895" cy="256032"/>
           </a:xfrm>
           <a:prstGeom prst="rect">
             <a:avLst/>
@@ -2596,7 +2596,7 @@
         </p:nvSpPr>
         <p:spPr>
           <a:xfrm>
-            <a:off x="11091672" y="6400800"/>
+            <a:off x="10865815" y="6400800"/>
             <a:ext cx="640080" cy="256032"/>
           </a:xfrm>
           <a:prstGeom prst="rect">
@@ -2635,8 +2635,8 @@
         </p:nvSpPr>
         <p:spPr>
           <a:xfrm>
-            <a:off x="991658" y="2353775"/>
-            <a:ext cx="1402296" cy="2973098"/>
+            <a:off x="996033" y="2667835"/>
+            <a:ext cx="1278564" cy="2710766"/>
           </a:xfrm>
           <a:prstGeom prst="roundRect">
             <a:avLst>
@@ -2662,8 +2662,8 @@
         </p:nvSpPr>
         <p:spPr>
           <a:xfrm>
-            <a:off x="1083098" y="3566005"/>
-            <a:ext cx="1219416" cy="548640"/>
+            <a:off x="1087473" y="3748898"/>
+            <a:ext cx="1095684" cy="548640"/>
           </a:xfrm>
           <a:prstGeom prst="rect">
             <a:avLst/>
@@ -2726,8 +2726,8 @@
         </p:blipFill>
         <p:spPr>
           <a:xfrm>
-            <a:off x="914400" y="2286000"/>
-            <a:ext cx="1554480" cy="3108960"/>
+            <a:off x="925592" y="2606040"/>
+            <a:ext cx="1417320" cy="2834640"/>
           </a:xfrm>
           <a:prstGeom prst="rect">
             <a:avLst/>
@@ -2742,12 +2742,12 @@
         </p:nvSpPr>
         <p:spPr>
           <a:xfrm>
-            <a:off x="3041395" y="1945413"/>
-            <a:ext cx="2500594" cy="3335786"/>
+            <a:off x="2952277" y="2256483"/>
+            <a:ext cx="2308241" cy="3079187"/>
           </a:xfrm>
           <a:prstGeom prst="roundRect">
             <a:avLst>
-              <a:gd name="adj" fmla="val 10970"/>
+              <a:gd name="adj" fmla="val 11884"/>
             </a:avLst>
           </a:prstGeom>
           <a:solidFill>
@@ -2769,8 +2769,8 @@
         </p:nvSpPr>
         <p:spPr>
           <a:xfrm>
-            <a:off x="3132835" y="3338986"/>
-            <a:ext cx="2317714" cy="548640"/>
+            <a:off x="3043717" y="3521757"/>
+            <a:ext cx="2125361" cy="548640"/>
           </a:xfrm>
           <a:prstGeom prst="rect">
             <a:avLst/>
@@ -2833,8 +2833,8 @@
         </p:blipFill>
         <p:spPr>
           <a:xfrm>
-            <a:off x="2926080" y="1828800"/>
-            <a:ext cx="2732591" cy="3566160"/>
+            <a:off x="2845832" y="2148840"/>
+            <a:ext cx="2522392" cy="3291840"/>
           </a:xfrm>
           <a:prstGeom prst="rect">
             <a:avLst/>
@@ -2849,12 +2849,12 @@
         </p:nvSpPr>
         <p:spPr>
           <a:xfrm>
-            <a:off x="6571976" y="2288908"/>
-            <a:ext cx="4418381" cy="2774969"/>
+            <a:off x="6534723" y="2577288"/>
+            <a:ext cx="4073195" cy="2558174"/>
           </a:xfrm>
           <a:prstGeom prst="roundRect">
             <a:avLst>
-              <a:gd name="adj" fmla="val 1318"/>
+              <a:gd name="adj" fmla="val 1430"/>
             </a:avLst>
           </a:prstGeom>
           <a:solidFill>
@@ -2876,8 +2876,8 @@
         </p:nvSpPr>
         <p:spPr>
           <a:xfrm>
-            <a:off x="6663416" y="3402072"/>
-            <a:ext cx="4235501" cy="548640"/>
+            <a:off x="6626163" y="3582055"/>
+            <a:ext cx="3890315" cy="548640"/>
           </a:xfrm>
           <a:prstGeom prst="rect">
             <a:avLst/>
@@ -2940,8 +2940,8 @@
         </p:blipFill>
         <p:spPr>
           <a:xfrm>
-            <a:off x="5852160" y="2097314"/>
-            <a:ext cx="5852160" cy="3297646"/>
+            <a:off x="5871143" y="2400663"/>
+            <a:ext cx="5394960" cy="3040017"/>
           </a:xfrm>
           <a:prstGeom prst="rect">
             <a:avLst/>
@@ -2956,8 +2956,8 @@
         </p:nvSpPr>
         <p:spPr>
           <a:xfrm>
-            <a:off x="914400" y="5532120"/>
-            <a:ext cx="1554480" cy="274320"/>
+            <a:off x="925592" y="5550408"/>
+            <a:ext cx="1417320" cy="256032"/>
           </a:xfrm>
           <a:prstGeom prst="rect">
             <a:avLst/>
@@ -2995,8 +2995,8 @@
         </p:nvSpPr>
         <p:spPr>
           <a:xfrm>
-            <a:off x="2926080" y="5532120"/>
-            <a:ext cx="2732591" cy="274320"/>
+            <a:off x="2845832" y="5550408"/>
+            <a:ext cx="2522392" cy="256032"/>
           </a:xfrm>
           <a:prstGeom prst="rect">
             <a:avLst/>
@@ -3034,8 +3034,8 @@
         </p:nvSpPr>
         <p:spPr>
           <a:xfrm>
-            <a:off x="5852160" y="5532120"/>
-            <a:ext cx="5852160" cy="274320"/>
+            <a:off x="5871143" y="5550408"/>
+            <a:ext cx="5394960" cy="256032"/>
           </a:xfrm>
           <a:prstGeom prst="rect">
             <a:avLst/>
@@ -3073,8 +3073,8 @@
         </p:nvSpPr>
         <p:spPr>
           <a:xfrm>
-            <a:off x="457200" y="5943600"/>
-            <a:ext cx="11277295" cy="365760"/>
+            <a:off x="685800" y="5989320"/>
+            <a:ext cx="10820095" cy="274320"/>
           </a:xfrm>
           <a:prstGeom prst="rect">
             <a:avLst/>
@@ -3090,7 +3090,7 @@
               <a:buNone/>
             </a:pPr>
             <a:r>
-              <a:rPr lang="en-US" sz="1350" dirty="0">
+              <a:rPr lang="en-US" sz="1050" dirty="0">
                 <a:solidFill>
                   <a:srgbClr val="63666A"/>
                 </a:solidFill>
@@ -3098,9 +3098,9 @@
                 <a:ea typeface="Hanken Grotesk" pitchFamily="34" charset="-122"/>
                 <a:cs typeface="Hanken Grotesk" pitchFamily="34" charset="-120"/>
               </a:rPr>
-              <a:t>Est eros bibendum elit nec luctus magna felis sollicitudin mauris integer in mauris eu nibh euismod gravida lorem ipsum dolor.</a:t>
-            </a:r>
-            <a:endParaRPr lang="en-US" sz="1350" dirty="0"/>
+              <a:t>Est eros bibendum elit nec luctus magna felis sollicitudin mauris integer in mauris eu.</a:t>
+            </a:r>
+            <a:endParaRPr lang="en-US" sz="1050" dirty="0"/>
           </a:p>
         </p:txBody>
       </p:sp>
@@ -3144,8 +3144,8 @@
         </p:nvSpPr>
         <p:spPr>
           <a:xfrm>
-            <a:off x="457200" y="384048"/>
-            <a:ext cx="8961120" cy="274320"/>
+            <a:off x="685800" y="502920"/>
+            <a:ext cx="8595360" cy="274320"/>
           </a:xfrm>
           <a:prstGeom prst="rect">
             <a:avLst/>
@@ -3183,8 +3183,8 @@
         </p:nvSpPr>
         <p:spPr>
           <a:xfrm>
-            <a:off x="457200" y="676656"/>
-            <a:ext cx="11274552" cy="868680"/>
+            <a:off x="685800" y="804672"/>
+            <a:ext cx="10820095" cy="566928"/>
           </a:xfrm>
           <a:prstGeom prst="rect">
             <a:avLst/>
@@ -3203,7 +3203,7 @@
               <a:buNone/>
             </a:pPr>
             <a:r>
-              <a:rPr lang="en-US" sz="3000" b="1" dirty="0">
+              <a:rPr lang="en-US" sz="2800" b="1" dirty="0">
                 <a:solidFill>
                   <a:srgbClr val="222731"/>
                 </a:solidFill>
@@ -3211,9 +3211,9 @@
                 <a:ea typeface="Bricolage Grotesque" pitchFamily="34" charset="-122"/>
                 <a:cs typeface="Bricolage Grotesque" pitchFamily="34" charset="-120"/>
               </a:rPr>
-              <a:t>Gravida orci a odio nullam varius turpis et commodo pharetra est</a:t>
-            </a:r>
-            <a:endParaRPr lang="en-US" sz="3000" dirty="0"/>
+              <a:t>Gravida orci a odio nullam varius</a:t>
+            </a:r>
+            <a:endParaRPr lang="en-US" sz="2800" dirty="0"/>
           </a:p>
         </p:txBody>
       </p:sp>
@@ -3225,7 +3225,7 @@
         </p:nvSpPr>
         <p:spPr>
           <a:xfrm>
-            <a:off x="457200" y="6400800"/>
+            <a:off x="685800" y="6400800"/>
             <a:ext cx="4389120" cy="256032"/>
           </a:xfrm>
           <a:prstGeom prst="rect">
@@ -3265,7 +3265,7 @@
         <p:spPr>
           <a:xfrm>
             <a:off x="4937760" y="6400800"/>
-            <a:ext cx="5943600" cy="256032"/>
+            <a:ext cx="5790895" cy="256032"/>
           </a:xfrm>
           <a:prstGeom prst="rect">
             <a:avLst/>
@@ -3303,7 +3303,7 @@
         </p:nvSpPr>
         <p:spPr>
           <a:xfrm>
-            <a:off x="11091672" y="6400800"/>
+            <a:off x="10865815" y="6400800"/>
             <a:ext cx="640080" cy="256032"/>
           </a:xfrm>
           <a:prstGeom prst="rect">
@@ -3342,12 +3342,12 @@
         </p:nvSpPr>
         <p:spPr>
           <a:xfrm>
-            <a:off x="457200" y="1783080"/>
-            <a:ext cx="5486400" cy="4343400"/>
+            <a:off x="685800" y="1691640"/>
+            <a:ext cx="5272888" cy="4069080"/>
           </a:xfrm>
           <a:prstGeom prst="roundRect">
             <a:avLst>
-              <a:gd name="adj" fmla="val 2526"/>
+              <a:gd name="adj" fmla="val 2697"/>
             </a:avLst>
           </a:prstGeom>
           <a:solidFill>
@@ -3369,8 +3369,8 @@
         </p:nvSpPr>
         <p:spPr>
           <a:xfrm>
-            <a:off x="777240" y="2103120"/>
-            <a:ext cx="4572000" cy="274320"/>
+            <a:off x="1051560" y="2057400"/>
+            <a:ext cx="4541368" cy="274320"/>
           </a:xfrm>
           <a:prstGeom prst="rect">
             <a:avLst/>
@@ -3408,8 +3408,8 @@
         </p:nvSpPr>
         <p:spPr>
           <a:xfrm>
-            <a:off x="777240" y="2423160"/>
-            <a:ext cx="4846320" cy="1188720"/>
+            <a:off x="1051560" y="2423160"/>
+            <a:ext cx="4541368" cy="1005840"/>
           </a:xfrm>
           <a:prstGeom prst="rect">
             <a:avLst/>
@@ -3433,7 +3433,7 @@
                 <a:ea typeface="Bricolage Grotesque" pitchFamily="34" charset="-122"/>
                 <a:cs typeface="Bricolage Grotesque" pitchFamily="34" charset="-120"/>
               </a:rPr>
-              <a:t>Fugiat nulla pariatur excepteur sint occaecat cupidatat non proident sunt in culpa.</a:t>
+              <a:t>Fugiat nulla pariatur excepteur sint occaecat cupidatat non proident sunt.</a:t>
             </a:r>
             <a:endParaRPr lang="en-US" sz="2000" dirty="0"/>
           </a:p>
@@ -3447,8 +3447,8 @@
         </p:nvSpPr>
         <p:spPr>
           <a:xfrm>
-            <a:off x="777240" y="3749040"/>
-            <a:ext cx="4846320" cy="2103120"/>
+            <a:off x="1051560" y="3611880"/>
+            <a:ext cx="4541368" cy="1783080"/>
           </a:xfrm>
           <a:prstGeom prst="rect">
             <a:avLst/>
@@ -3472,7 +3472,7 @@
                 <a:ea typeface="Hanken Grotesk" pitchFamily="34" charset="-122"/>
                 <a:cs typeface="Hanken Grotesk" pitchFamily="34" charset="-120"/>
               </a:rPr>
-              <a:t>Amet consectetur adipiscing elit sed do eiusmod tempor incididunt ut labore et dolore magna aliqua ut enim ad minim veniam quis nostrud exercitation ullamco laboris nisi ut aliquip ex ea commodo consequat duis aute irure dolor in reprehenderit in voluptate.</a:t>
+              <a:t>Amet consectetur adipiscing elit sed do eiusmod tempor incididunt ut labore et dolore magna aliqua ut enim ad minim veniam quis nostrud exercitation ullamco laboris nisi.</a:t>
             </a:r>
             <a:endParaRPr lang="en-US" sz="1350" dirty="0"/>
           </a:p>
@@ -3486,12 +3486,12 @@
         </p:nvSpPr>
         <p:spPr>
           <a:xfrm>
-            <a:off x="6263640" y="1783080"/>
-            <a:ext cx="5470855" cy="4343400"/>
+            <a:off x="6233008" y="1691640"/>
+            <a:ext cx="5272888" cy="4069080"/>
           </a:xfrm>
           <a:prstGeom prst="roundRect">
             <a:avLst>
-              <a:gd name="adj" fmla="val 2526"/>
+              <a:gd name="adj" fmla="val 2697"/>
             </a:avLst>
           </a:prstGeom>
           <a:solidFill>
@@ -3513,8 +3513,8 @@
         </p:nvSpPr>
         <p:spPr>
           <a:xfrm>
-            <a:off x="6583680" y="2103120"/>
-            <a:ext cx="4572000" cy="274320"/>
+            <a:off x="6598768" y="2057400"/>
+            <a:ext cx="4541368" cy="274320"/>
           </a:xfrm>
           <a:prstGeom prst="rect">
             <a:avLst/>
@@ -3551,8 +3551,8 @@
           <p:nvPr/>
         </p:nvGraphicFramePr>
         <p:xfrm>
-          <a:off x="6492240" y="2468880"/>
-          <a:ext cx="4967935" cy="2560320"/>
+          <a:off x="6461608" y="2423160"/>
+          <a:ext cx="4815688" cy="2606040"/>
         </p:xfrm>
         <a:graphic xmlns:a="http://schemas.openxmlformats.org/drawingml/2006/main">
           <a:graphicData uri="http://schemas.openxmlformats.org/drawingml/2006/chart">
@@ -3568,8 +3568,8 @@
         </p:nvSpPr>
         <p:spPr>
           <a:xfrm>
-            <a:off x="6583680" y="5257800"/>
-            <a:ext cx="4572000" cy="274320"/>
+            <a:off x="6598768" y="5166360"/>
+            <a:ext cx="4541368" cy="256032"/>
           </a:xfrm>
           <a:prstGeom prst="rect">
             <a:avLst/>
@@ -3639,8 +3639,8 @@
         </p:nvSpPr>
         <p:spPr>
           <a:xfrm>
-            <a:off x="457200" y="384048"/>
-            <a:ext cx="8961120" cy="274320"/>
+            <a:off x="685800" y="502920"/>
+            <a:ext cx="8595360" cy="274320"/>
           </a:xfrm>
           <a:prstGeom prst="rect">
             <a:avLst/>
@@ -3678,8 +3678,8 @@
         </p:nvSpPr>
         <p:spPr>
           <a:xfrm>
-            <a:off x="457200" y="676656"/>
-            <a:ext cx="11274552" cy="868680"/>
+            <a:off x="685800" y="804672"/>
+            <a:ext cx="10820095" cy="566928"/>
           </a:xfrm>
           <a:prstGeom prst="rect">
             <a:avLst/>
@@ -3698,7 +3698,7 @@
               <a:buNone/>
             </a:pPr>
             <a:r>
-              <a:rPr lang="en-US" sz="3000" b="1" dirty="0">
+              <a:rPr lang="en-US" sz="2800" b="1" dirty="0">
                 <a:solidFill>
                   <a:srgbClr val="222731"/>
                 </a:solidFill>
@@ -3706,9 +3706,9 @@
                 <a:ea typeface="Bricolage Grotesque" pitchFamily="34" charset="-122"/>
                 <a:cs typeface="Bricolage Grotesque" pitchFamily="34" charset="-120"/>
               </a:rPr>
-              <a:t>In mauris eu nibh euismod gravida lorem ipsum dolor</a:t>
-            </a:r>
-            <a:endParaRPr lang="en-US" sz="3000" dirty="0"/>
+              <a:t>In mauris eu nibh euismod gravida lorem</a:t>
+            </a:r>
+            <a:endParaRPr lang="en-US" sz="2800" dirty="0"/>
           </a:p>
         </p:txBody>
       </p:sp>
@@ -3720,7 +3720,7 @@
         </p:nvSpPr>
         <p:spPr>
           <a:xfrm>
-            <a:off x="457200" y="6400800"/>
+            <a:off x="685800" y="6400800"/>
             <a:ext cx="4389120" cy="256032"/>
           </a:xfrm>
           <a:prstGeom prst="rect">
@@ -3760,7 +3760,7 @@
         <p:spPr>
           <a:xfrm>
             <a:off x="4937760" y="6400800"/>
-            <a:ext cx="5943600" cy="256032"/>
+            <a:ext cx="5790895" cy="256032"/>
           </a:xfrm>
           <a:prstGeom prst="rect">
             <a:avLst/>
@@ -3798,7 +3798,7 @@
         </p:nvSpPr>
         <p:spPr>
           <a:xfrm>
-            <a:off x="11091672" y="6400800"/>
+            <a:off x="10865815" y="6400800"/>
             <a:ext cx="640080" cy="256032"/>
           </a:xfrm>
           <a:prstGeom prst="rect">
@@ -3837,12 +3837,12 @@
         </p:nvSpPr>
         <p:spPr>
           <a:xfrm>
-            <a:off x="457200" y="1783080"/>
-            <a:ext cx="2613584" cy="3108960"/>
+            <a:off x="685800" y="1691640"/>
+            <a:ext cx="2499284" cy="2697480"/>
           </a:xfrm>
           <a:prstGeom prst="roundRect">
             <a:avLst>
-              <a:gd name="adj" fmla="val 4198"/>
+              <a:gd name="adj" fmla="val 4390"/>
             </a:avLst>
           </a:prstGeom>
           <a:solidFill>
@@ -3864,8 +3864,8 @@
         </p:nvSpPr>
         <p:spPr>
           <a:xfrm>
-            <a:off x="731520" y="2057400"/>
-            <a:ext cx="2064944" cy="548640"/>
+            <a:off x="1051560" y="2057400"/>
+            <a:ext cx="1767764" cy="292608"/>
           </a:xfrm>
           <a:prstGeom prst="rect">
             <a:avLst/>
@@ -3903,8 +3903,8 @@
         </p:nvSpPr>
         <p:spPr>
           <a:xfrm>
-            <a:off x="731520" y="2697480"/>
-            <a:ext cx="2064944" cy="777240"/>
+            <a:off x="1051560" y="2514600"/>
+            <a:ext cx="1767764" cy="731520"/>
           </a:xfrm>
           <a:prstGeom prst="rect">
             <a:avLst/>
@@ -3920,7 +3920,7 @@
               <a:buNone/>
             </a:pPr>
             <a:r>
-              <a:rPr lang="en-US" sz="3200" b="1" dirty="0">
+              <a:rPr lang="en-US" sz="2600" b="1" dirty="0">
                 <a:solidFill>
                   <a:srgbClr val="2E4AED"/>
                 </a:solidFill>
@@ -3930,7 +3930,7 @@
               </a:rPr>
               <a:t>46%</a:t>
             </a:r>
-            <a:endParaRPr lang="en-US" sz="3200" dirty="0"/>
+            <a:endParaRPr lang="en-US" sz="2600" dirty="0"/>
           </a:p>
         </p:txBody>
       </p:sp>
@@ -3942,7 +3942,7 @@
         </p:nvSpPr>
         <p:spPr>
           <a:xfrm>
-            <a:off x="731520" y="3593592"/>
+            <a:off x="1051560" y="3383280"/>
             <a:ext cx="1737360" cy="347472"/>
           </a:xfrm>
           <a:prstGeom prst="roundRect">
@@ -3977,7 +3977,7 @@
         </p:blipFill>
         <p:spPr>
           <a:xfrm>
-            <a:off x="822960" y="3657600"/>
+            <a:off x="1143000" y="3447288"/>
             <a:ext cx="219456" cy="219456"/>
           </a:xfrm>
           <a:prstGeom prst="rect">
@@ -3993,7 +3993,7 @@
         </p:nvSpPr>
         <p:spPr>
           <a:xfrm>
-            <a:off x="1115568" y="3593592"/>
+            <a:off x="1435608" y="3383280"/>
             <a:ext cx="1325880" cy="347472"/>
           </a:xfrm>
           <a:prstGeom prst="rect">
@@ -4032,8 +4032,8 @@
         </p:nvSpPr>
         <p:spPr>
           <a:xfrm>
-            <a:off x="731520" y="4069080"/>
-            <a:ext cx="2064944" cy="685800"/>
+            <a:off x="1051560" y="3867912"/>
+            <a:ext cx="1767764" cy="365760"/>
           </a:xfrm>
           <a:prstGeom prst="rect">
             <a:avLst/>
@@ -4071,12 +4071,12 @@
         </p:nvSpPr>
         <p:spPr>
           <a:xfrm>
-            <a:off x="3345104" y="1783080"/>
-            <a:ext cx="2613584" cy="3108960"/>
+            <a:off x="3459404" y="1691640"/>
+            <a:ext cx="2499284" cy="2697480"/>
           </a:xfrm>
           <a:prstGeom prst="roundRect">
             <a:avLst>
-              <a:gd name="adj" fmla="val 4198"/>
+              <a:gd name="adj" fmla="val 4390"/>
             </a:avLst>
           </a:prstGeom>
           <a:solidFill>
@@ -4098,8 +4098,8 @@
         </p:nvSpPr>
         <p:spPr>
           <a:xfrm>
-            <a:off x="3619424" y="2057400"/>
-            <a:ext cx="2064944" cy="548640"/>
+            <a:off x="3825164" y="2057400"/>
+            <a:ext cx="1767764" cy="292608"/>
           </a:xfrm>
           <a:prstGeom prst="rect">
             <a:avLst/>
@@ -4137,8 +4137,8 @@
         </p:nvSpPr>
         <p:spPr>
           <a:xfrm>
-            <a:off x="3619424" y="2697480"/>
-            <a:ext cx="2064944" cy="777240"/>
+            <a:off x="3825164" y="2514600"/>
+            <a:ext cx="1767764" cy="731520"/>
           </a:xfrm>
           <a:prstGeom prst="rect">
             <a:avLst/>
@@ -4154,7 +4154,7 @@
               <a:buNone/>
             </a:pPr>
             <a:r>
-              <a:rPr lang="en-US" sz="3200" b="1" dirty="0">
+              <a:rPr lang="en-US" sz="2600" b="1" dirty="0">
                 <a:solidFill>
                   <a:srgbClr val="2E4AED"/>
                 </a:solidFill>
@@ -4164,7 +4164,7 @@
               </a:rPr>
               <a:t>–18 days</a:t>
             </a:r>
-            <a:endParaRPr lang="en-US" sz="3200" dirty="0"/>
+            <a:endParaRPr lang="en-US" sz="2600" dirty="0"/>
           </a:p>
         </p:txBody>
       </p:sp>
@@ -4176,7 +4176,7 @@
         </p:nvSpPr>
         <p:spPr>
           <a:xfrm>
-            <a:off x="3619424" y="3593592"/>
+            <a:off x="3825164" y="3383280"/>
             <a:ext cx="1737360" cy="347472"/>
           </a:xfrm>
           <a:prstGeom prst="roundRect">
@@ -4211,7 +4211,7 @@
         </p:blipFill>
         <p:spPr>
           <a:xfrm>
-            <a:off x="3710864" y="3657600"/>
+            <a:off x="3916604" y="3447288"/>
             <a:ext cx="219456" cy="219456"/>
           </a:xfrm>
           <a:prstGeom prst="rect">
@@ -4227,7 +4227,7 @@
         </p:nvSpPr>
         <p:spPr>
           <a:xfrm>
-            <a:off x="4003472" y="3593592"/>
+            <a:off x="4209212" y="3383280"/>
             <a:ext cx="1325880" cy="347472"/>
           </a:xfrm>
           <a:prstGeom prst="rect">
@@ -4266,8 +4266,8 @@
         </p:nvSpPr>
         <p:spPr>
           <a:xfrm>
-            <a:off x="3619424" y="4069080"/>
-            <a:ext cx="2064944" cy="685800"/>
+            <a:off x="3825164" y="3867912"/>
+            <a:ext cx="1767764" cy="365760"/>
           </a:xfrm>
           <a:prstGeom prst="rect">
             <a:avLst/>
@@ -4305,12 +4305,12 @@
         </p:nvSpPr>
         <p:spPr>
           <a:xfrm>
-            <a:off x="6233008" y="1783080"/>
-            <a:ext cx="2613584" cy="3108960"/>
+            <a:off x="6233008" y="1691640"/>
+            <a:ext cx="2499284" cy="2697480"/>
           </a:xfrm>
           <a:prstGeom prst="roundRect">
             <a:avLst>
-              <a:gd name="adj" fmla="val 4198"/>
+              <a:gd name="adj" fmla="val 4390"/>
             </a:avLst>
           </a:prstGeom>
           <a:solidFill>
@@ -4332,8 +4332,8 @@
         </p:nvSpPr>
         <p:spPr>
           <a:xfrm>
-            <a:off x="6507328" y="2057400"/>
-            <a:ext cx="2064944" cy="548640"/>
+            <a:off x="6598768" y="2057400"/>
+            <a:ext cx="1767764" cy="292608"/>
           </a:xfrm>
           <a:prstGeom prst="rect">
             <a:avLst/>
@@ -4371,8 +4371,8 @@
         </p:nvSpPr>
         <p:spPr>
           <a:xfrm>
-            <a:off x="6507328" y="2697480"/>
-            <a:ext cx="2064944" cy="777240"/>
+            <a:off x="6598768" y="2514600"/>
+            <a:ext cx="1767764" cy="731520"/>
           </a:xfrm>
           <a:prstGeom prst="rect">
             <a:avLst/>
@@ -4388,7 +4388,7 @@
               <a:buNone/>
             </a:pPr>
             <a:r>
-              <a:rPr lang="en-US" sz="3200" b="1" dirty="0">
+              <a:rPr lang="en-US" sz="2600" b="1" dirty="0">
                 <a:solidFill>
                   <a:srgbClr val="2E4AED"/>
                 </a:solidFill>
@@ -4398,7 +4398,7 @@
               </a:rPr>
               <a:t>5 → 2</a:t>
             </a:r>
-            <a:endParaRPr lang="en-US" sz="3200" dirty="0"/>
+            <a:endParaRPr lang="en-US" sz="2600" dirty="0"/>
           </a:p>
         </p:txBody>
       </p:sp>
@@ -4410,7 +4410,7 @@
         </p:nvSpPr>
         <p:spPr>
           <a:xfrm>
-            <a:off x="6507328" y="3593592"/>
+            <a:off x="6598768" y="3383280"/>
             <a:ext cx="1737360" cy="347472"/>
           </a:xfrm>
           <a:prstGeom prst="roundRect">
@@ -4445,7 +4445,7 @@
         </p:blipFill>
         <p:spPr>
           <a:xfrm>
-            <a:off x="6598768" y="3657600"/>
+            <a:off x="6690208" y="3447288"/>
             <a:ext cx="219456" cy="219456"/>
           </a:xfrm>
           <a:prstGeom prst="rect">
@@ -4461,7 +4461,7 @@
         </p:nvSpPr>
         <p:spPr>
           <a:xfrm>
-            <a:off x="6891376" y="3593592"/>
+            <a:off x="6982816" y="3383280"/>
             <a:ext cx="1325880" cy="347472"/>
           </a:xfrm>
           <a:prstGeom prst="rect">
@@ -4500,8 +4500,8 @@
         </p:nvSpPr>
         <p:spPr>
           <a:xfrm>
-            <a:off x="6507328" y="4069080"/>
-            <a:ext cx="2064944" cy="685800"/>
+            <a:off x="6598768" y="3867912"/>
+            <a:ext cx="1767764" cy="365760"/>
           </a:xfrm>
           <a:prstGeom prst="rect">
             <a:avLst/>
@@ -4539,12 +4539,12 @@
         </p:nvSpPr>
         <p:spPr>
           <a:xfrm>
-            <a:off x="9120911" y="1783080"/>
-            <a:ext cx="2613584" cy="3108960"/>
+            <a:off x="9006611" y="1691640"/>
+            <a:ext cx="2499284" cy="2697480"/>
           </a:xfrm>
           <a:prstGeom prst="roundRect">
             <a:avLst>
-              <a:gd name="adj" fmla="val 4198"/>
+              <a:gd name="adj" fmla="val 4390"/>
             </a:avLst>
           </a:prstGeom>
           <a:solidFill>
@@ -4566,8 +4566,8 @@
         </p:nvSpPr>
         <p:spPr>
           <a:xfrm>
-            <a:off x="9395231" y="2057400"/>
-            <a:ext cx="2064944" cy="548640"/>
+            <a:off x="9372371" y="2057400"/>
+            <a:ext cx="1767764" cy="292608"/>
           </a:xfrm>
           <a:prstGeom prst="rect">
             <a:avLst/>
@@ -4605,8 +4605,8 @@
         </p:nvSpPr>
         <p:spPr>
           <a:xfrm>
-            <a:off x="9395231" y="2697480"/>
-            <a:ext cx="2064944" cy="777240"/>
+            <a:off x="9372371" y="2514600"/>
+            <a:ext cx="1767764" cy="731520"/>
           </a:xfrm>
           <a:prstGeom prst="rect">
             <a:avLst/>
@@ -4622,7 +4622,7 @@
               <a:buNone/>
             </a:pPr>
             <a:r>
-              <a:rPr lang="en-US" sz="3200" b="1" dirty="0">
+              <a:rPr lang="en-US" sz="2600" b="1" dirty="0">
                 <a:solidFill>
                   <a:srgbClr val="2E4AED"/>
                 </a:solidFill>
@@ -4632,7 +4632,7 @@
               </a:rPr>
               <a:t>4.5</a:t>
             </a:r>
-            <a:endParaRPr lang="en-US" sz="3200" dirty="0"/>
+            <a:endParaRPr lang="en-US" sz="2600" dirty="0"/>
           </a:p>
         </p:txBody>
       </p:sp>
@@ -4644,7 +4644,7 @@
         </p:nvSpPr>
         <p:spPr>
           <a:xfrm>
-            <a:off x="9395231" y="3593592"/>
+            <a:off x="9372371" y="3383280"/>
             <a:ext cx="1737360" cy="347472"/>
           </a:xfrm>
           <a:prstGeom prst="roundRect">
@@ -4679,7 +4679,7 @@
         </p:blipFill>
         <p:spPr>
           <a:xfrm>
-            <a:off x="9486671" y="3657600"/>
+            <a:off x="9463811" y="3447288"/>
             <a:ext cx="219456" cy="219456"/>
           </a:xfrm>
           <a:prstGeom prst="rect">
@@ -4695,7 +4695,7 @@
         </p:nvSpPr>
         <p:spPr>
           <a:xfrm>
-            <a:off x="9779279" y="3593592"/>
+            <a:off x="9756419" y="3383280"/>
             <a:ext cx="1325880" cy="347472"/>
           </a:xfrm>
           <a:prstGeom prst="rect">
@@ -4734,8 +4734,8 @@
         </p:nvSpPr>
         <p:spPr>
           <a:xfrm>
-            <a:off x="9395231" y="4069080"/>
-            <a:ext cx="2064944" cy="685800"/>
+            <a:off x="9372371" y="3867912"/>
+            <a:ext cx="1767764" cy="365760"/>
           </a:xfrm>
           <a:prstGeom prst="rect">
             <a:avLst/>
@@ -4773,8 +4773,8 @@
         </p:nvSpPr>
         <p:spPr>
           <a:xfrm>
-            <a:off x="457200" y="5120640"/>
-            <a:ext cx="11277295" cy="1005840"/>
+            <a:off x="685800" y="4663440"/>
+            <a:ext cx="10820095" cy="1005840"/>
           </a:xfrm>
           <a:prstGeom prst="roundRect">
             <a:avLst>
@@ -4800,8 +4800,8 @@
         </p:nvSpPr>
         <p:spPr>
           <a:xfrm>
-            <a:off x="731520" y="5120640"/>
-            <a:ext cx="10728655" cy="1005840"/>
+            <a:off x="1051560" y="4663440"/>
+            <a:ext cx="10088575" cy="1005840"/>
           </a:xfrm>
           <a:prstGeom prst="rect">
             <a:avLst/>
@@ -4839,7 +4839,7 @@
                 <a:ea typeface="Hanken Grotesk" pitchFamily="34" charset="-122"/>
                 <a:cs typeface="Hanken Grotesk" pitchFamily="34" charset="-120"/>
               </a:rPr>
-              <a:t>Nibh euismod gravida lorem ipsum dolor sit amet consectetur adipiscing elit sed do eiusmod tempor incididunt ut labore et dolore magna aliqua ut enim ad minim.</a:t>
+              <a:t>Nibh euismod gravida lorem ipsum dolor sit amet consectetur adipiscing elit sed do eiusmod tempor incididunt ut labore.</a:t>
             </a:r>
             <a:endParaRPr lang="en-US" sz="1350" dirty="0"/>
           </a:p>
@@ -4885,8 +4885,8 @@
         </p:nvSpPr>
         <p:spPr>
           <a:xfrm>
-            <a:off x="457200" y="384048"/>
-            <a:ext cx="8961120" cy="274320"/>
+            <a:off x="685800" y="502920"/>
+            <a:ext cx="8595360" cy="274320"/>
           </a:xfrm>
           <a:prstGeom prst="rect">
             <a:avLst/>
@@ -4924,8 +4924,8 @@
         </p:nvSpPr>
         <p:spPr>
           <a:xfrm>
-            <a:off x="457200" y="676656"/>
-            <a:ext cx="11274552" cy="868680"/>
+            <a:off x="685800" y="804672"/>
+            <a:ext cx="10820095" cy="566928"/>
           </a:xfrm>
           <a:prstGeom prst="rect">
             <a:avLst/>
@@ -4944,7 +4944,7 @@
               <a:buNone/>
             </a:pPr>
             <a:r>
-              <a:rPr lang="en-US" sz="3000" b="1" dirty="0">
+              <a:rPr lang="en-US" sz="2800" b="1" dirty="0">
                 <a:solidFill>
                   <a:srgbClr val="222731"/>
                 </a:solidFill>
@@ -4952,9 +4952,9 @@
                 <a:ea typeface="Bricolage Grotesque" pitchFamily="34" charset="-122"/>
                 <a:cs typeface="Bricolage Grotesque" pitchFamily="34" charset="-120"/>
               </a:rPr>
-              <a:t>Et dolore magna aliqua ut enim ad minim veniam quis</a:t>
-            </a:r>
-            <a:endParaRPr lang="en-US" sz="3000" dirty="0"/>
+              <a:t>Et dolore magna aliqua ut enim</a:t>
+            </a:r>
+            <a:endParaRPr lang="en-US" sz="2800" dirty="0"/>
           </a:p>
         </p:txBody>
       </p:sp>
@@ -4966,7 +4966,7 @@
         </p:nvSpPr>
         <p:spPr>
           <a:xfrm>
-            <a:off x="457200" y="6400800"/>
+            <a:off x="685800" y="6400800"/>
             <a:ext cx="4389120" cy="256032"/>
           </a:xfrm>
           <a:prstGeom prst="rect">
@@ -5006,7 +5006,7 @@
         <p:spPr>
           <a:xfrm>
             <a:off x="4937760" y="6400800"/>
-            <a:ext cx="5943600" cy="256032"/>
+            <a:ext cx="5790895" cy="256032"/>
           </a:xfrm>
           <a:prstGeom prst="rect">
             <a:avLst/>
@@ -5044,7 +5044,7 @@
         </p:nvSpPr>
         <p:spPr>
           <a:xfrm>
-            <a:off x="11091672" y="6400800"/>
+            <a:off x="10865815" y="6400800"/>
             <a:ext cx="640080" cy="256032"/>
           </a:xfrm>
           <a:prstGeom prst="rect">
@@ -5083,12 +5083,12 @@
         </p:nvSpPr>
         <p:spPr>
           <a:xfrm>
-            <a:off x="457200" y="1783080"/>
-            <a:ext cx="3383280" cy="4343400"/>
+            <a:off x="685800" y="1691640"/>
+            <a:ext cx="3291840" cy="4069080"/>
           </a:xfrm>
           <a:prstGeom prst="roundRect">
             <a:avLst>
-              <a:gd name="adj" fmla="val 3243"/>
+              <a:gd name="adj" fmla="val 3333"/>
             </a:avLst>
           </a:prstGeom>
           <a:solidFill>
@@ -5110,7 +5110,7 @@
         </p:nvSpPr>
         <p:spPr>
           <a:xfrm>
-            <a:off x="777240" y="2103120"/>
+            <a:off x="1051560" y="2057400"/>
             <a:ext cx="1828800" cy="365760"/>
           </a:xfrm>
           <a:prstGeom prst="roundRect">
@@ -5137,7 +5137,7 @@
         </p:nvSpPr>
         <p:spPr>
           <a:xfrm>
-            <a:off x="777240" y="2103120"/>
+            <a:off x="1051560" y="2057400"/>
             <a:ext cx="1828800" cy="365760"/>
           </a:xfrm>
           <a:prstGeom prst="rect">
@@ -5176,8 +5176,8 @@
         </p:nvSpPr>
         <p:spPr>
           <a:xfrm>
-            <a:off x="777240" y="2651760"/>
-            <a:ext cx="2743200" cy="1463040"/>
+            <a:off x="1051560" y="2651760"/>
+            <a:ext cx="2560320" cy="1280160"/>
           </a:xfrm>
           <a:prstGeom prst="rect">
             <a:avLst/>
@@ -5201,7 +5201,7 @@
                 <a:ea typeface="Bricolage Grotesque" pitchFamily="34" charset="-122"/>
                 <a:cs typeface="Bricolage Grotesque" pitchFamily="34" charset="-120"/>
               </a:rPr>
-              <a:t>Consequat duis aute irure dolor in reprehenderit in.</a:t>
+              <a:t>Consequat duis aute irure dolor in reprehenderit.</a:t>
             </a:r>
             <a:endParaRPr lang="en-US" sz="2000" dirty="0"/>
           </a:p>
@@ -5215,8 +5215,8 @@
         </p:nvSpPr>
         <p:spPr>
           <a:xfrm>
-            <a:off x="777240" y="4297680"/>
-            <a:ext cx="2743200" cy="1645920"/>
+            <a:off x="1051560" y="4206240"/>
+            <a:ext cx="2560320" cy="1188720"/>
           </a:xfrm>
           <a:prstGeom prst="rect">
             <a:avLst/>
@@ -5304,17 +5304,17 @@
           </p:nvPr>
         </p:nvGraphicFramePr>
         <p:xfrm>
-          <a:off x="4114800" y="1783080"/>
-          <a:ext cx="7619695" cy="914400"/>
+          <a:off x="4251960" y="1691640"/>
+          <a:ext cx="7253935" cy="914400"/>
         </p:xfrm>
         <a:graphic>
           <a:graphicData uri="http://schemas.openxmlformats.org/drawingml/2006/table">
             <a:tbl>
               <a:tblPr/>
               <a:tblGrid>
-                <a:gridCol w="731520"/>
-                <a:gridCol w="3687775"/>
-                <a:gridCol w="2011680"/>
+                <a:gridCol w="822960"/>
+                <a:gridCol w="3322015"/>
+                <a:gridCol w="1920240"/>
                 <a:gridCol w="1188720"/>
               </a:tblGrid>
               <a:tr h="457200">
@@ -5344,7 +5344,7 @@
                       </a:endParaRPr>
                     </a:p>
                   </a:txBody>
-                  <a:tcPr marL="137160" marR="137160" marT="0" marB="0" anchor="ctr">
+                  <a:tcPr marL="182880" marR="182880" marT="0" marB="0" anchor="ctr">
                     <a:lnL w="9525" cap="flat" cmpd="sng" algn="ctr">
                       <a:solidFill>
                         <a:srgbClr val="D9D9D6"/>
@@ -5412,7 +5412,7 @@
                       </a:endParaRPr>
                     </a:p>
                   </a:txBody>
-                  <a:tcPr marL="137160" marR="137160" marT="0" marB="0" anchor="ctr">
+                  <a:tcPr marL="182880" marR="182880" marT="0" marB="0" anchor="ctr">
                     <a:lnL w="9525" cap="flat" cmpd="sng" algn="ctr">
                       <a:solidFill>
                         <a:srgbClr val="D9D9D6"/>
@@ -5480,7 +5480,7 @@
                       </a:endParaRPr>
                     </a:p>
                   </a:txBody>
-                  <a:tcPr marL="137160" marR="137160" marT="0" marB="0" anchor="ctr">
+                  <a:tcPr marL="182880" marR="182880" marT="0" marB="0" anchor="ctr">
                     <a:lnL w="9525" cap="flat" cmpd="sng" algn="ctr">
                       <a:solidFill>
                         <a:srgbClr val="D9D9D6"/>
@@ -5548,7 +5548,7 @@
                       </a:endParaRPr>
                     </a:p>
                   </a:txBody>
-                  <a:tcPr marL="137160" marR="137160" marT="0" marB="0" anchor="ctr">
+                  <a:tcPr marL="182880" marR="182880" marT="0" marB="0" anchor="ctr">
                     <a:lnL w="9525" cap="flat" cmpd="sng" algn="ctr">
                       <a:solidFill>
                         <a:srgbClr val="D9D9D6"/>
@@ -5591,7 +5591,7 @@
                   </a:tcPr>
                 </a:tc>
               </a:tr>
-              <a:tr h="777240">
+              <a:tr h="722376">
                 <a:tc>
                   <a:txBody>
                     <a:bodyPr/>
@@ -5618,7 +5618,7 @@
                       </a:endParaRPr>
                     </a:p>
                   </a:txBody>
-                  <a:tcPr marL="137160" marR="137160" marT="0" marB="0" anchor="ctr">
+                  <a:tcPr marL="182880" marR="182880" marT="0" marB="0" anchor="ctr">
                     <a:lnL w="9525" cap="flat" cmpd="sng" algn="ctr">
                       <a:solidFill>
                         <a:srgbClr val="D9D9D6"/>
@@ -5677,7 +5677,7 @@
                           <a:ea typeface="Hanken Grotesk" pitchFamily="34" charset="-122"/>
                           <a:cs typeface="Hanken Grotesk" pitchFamily="34" charset="-120"/>
                         </a:rPr>
-                        <a:t>Ad minim veniam quis nostrud</a:t>
+                        <a:t>Ad minim veniam quis</a:t>
                       </a:r>
                       <a:endParaRPr lang="en-US" sz="1350" dirty="0">
                         <a:latin typeface="Hanken Grotesk" charset="0"/>
@@ -5686,7 +5686,7 @@
                       </a:endParaRPr>
                     </a:p>
                   </a:txBody>
-                  <a:tcPr marL="137160" marR="137160" marT="0" marB="0" anchor="ctr">
+                  <a:tcPr marL="182880" marR="182880" marT="0" marB="0" anchor="ctr">
                     <a:lnL w="9525" cap="flat" cmpd="sng" algn="ctr">
                       <a:solidFill>
                         <a:srgbClr val="D9D9D6"/>
@@ -5754,7 +5754,7 @@
                       </a:endParaRPr>
                     </a:p>
                   </a:txBody>
-                  <a:tcPr marL="137160" marR="137160" marT="0" marB="0" anchor="ctr">
+                  <a:tcPr marL="182880" marR="182880" marT="0" marB="0" anchor="ctr">
                     <a:lnL w="9525" cap="flat" cmpd="sng" algn="ctr">
                       <a:solidFill>
                         <a:srgbClr val="D9D9D6"/>
@@ -5822,7 +5822,7 @@
                       </a:endParaRPr>
                     </a:p>
                   </a:txBody>
-                  <a:tcPr marL="137160" marR="137160" marT="0" marB="0" anchor="ctr">
+                  <a:tcPr marL="182880" marR="182880" marT="0" marB="0" anchor="ctr">
                     <a:lnL w="9525" cap="flat" cmpd="sng" algn="ctr">
                       <a:solidFill>
                         <a:srgbClr val="D9D9D6"/>
@@ -5865,7 +5865,7 @@
                   </a:tcPr>
                 </a:tc>
               </a:tr>
-              <a:tr h="777240">
+              <a:tr h="722376">
                 <a:tc>
                   <a:txBody>
                     <a:bodyPr/>
@@ -5892,7 +5892,7 @@
                       </a:endParaRPr>
                     </a:p>
                   </a:txBody>
-                  <a:tcPr marL="137160" marR="137160" marT="0" marB="0" anchor="ctr">
+                  <a:tcPr marL="182880" marR="182880" marT="0" marB="0" anchor="ctr">
                     <a:lnL w="9525" cap="flat" cmpd="sng" algn="ctr">
                       <a:solidFill>
                         <a:srgbClr val="D9D9D6"/>
@@ -5951,7 +5951,7 @@
                           <a:ea typeface="Hanken Grotesk" pitchFamily="34" charset="-122"/>
                           <a:cs typeface="Hanken Grotesk" pitchFamily="34" charset="-120"/>
                         </a:rPr>
-                        <a:t>Fugiat nulla pariatur excepteur sint</a:t>
+                        <a:t>Fugiat nulla pariatur excepteur</a:t>
                       </a:r>
                       <a:endParaRPr lang="en-US" sz="1350" dirty="0">
                         <a:latin typeface="Hanken Grotesk" charset="0"/>
@@ -5960,7 +5960,7 @@
                       </a:endParaRPr>
                     </a:p>
                   </a:txBody>
-                  <a:tcPr marL="137160" marR="137160" marT="0" marB="0" anchor="ctr">
+                  <a:tcPr marL="182880" marR="182880" marT="0" marB="0" anchor="ctr">
                     <a:lnL w="9525" cap="flat" cmpd="sng" algn="ctr">
                       <a:solidFill>
                         <a:srgbClr val="D9D9D6"/>
@@ -6028,7 +6028,7 @@
                       </a:endParaRPr>
                     </a:p>
                   </a:txBody>
-                  <a:tcPr marL="137160" marR="137160" marT="0" marB="0" anchor="ctr">
+                  <a:tcPr marL="182880" marR="182880" marT="0" marB="0" anchor="ctr">
                     <a:lnL w="9525" cap="flat" cmpd="sng" algn="ctr">
                       <a:solidFill>
                         <a:srgbClr val="D9D9D6"/>
@@ -6096,7 +6096,7 @@
                       </a:endParaRPr>
                     </a:p>
                   </a:txBody>
-                  <a:tcPr marL="137160" marR="137160" marT="0" marB="0" anchor="ctr">
+                  <a:tcPr marL="182880" marR="182880" marT="0" marB="0" anchor="ctr">
                     <a:lnL w="9525" cap="flat" cmpd="sng" algn="ctr">
                       <a:solidFill>
                         <a:srgbClr val="D9D9D6"/>
@@ -6139,7 +6139,7 @@
                   </a:tcPr>
                 </a:tc>
               </a:tr>
-              <a:tr h="777240">
+              <a:tr h="722376">
                 <a:tc>
                   <a:txBody>
                     <a:bodyPr/>
@@ -6166,7 +6166,7 @@
                       </a:endParaRPr>
                     </a:p>
                   </a:txBody>
-                  <a:tcPr marL="137160" marR="137160" marT="0" marB="0" anchor="ctr">
+                  <a:tcPr marL="182880" marR="182880" marT="0" marB="0" anchor="ctr">
                     <a:lnL w="9525" cap="flat" cmpd="sng" algn="ctr">
                       <a:solidFill>
                         <a:srgbClr val="D9D9D6"/>
@@ -6225,7 +6225,7 @@
                           <a:ea typeface="Hanken Grotesk" pitchFamily="34" charset="-122"/>
                           <a:cs typeface="Hanken Grotesk" pitchFamily="34" charset="-120"/>
                         </a:rPr>
-                        <a:t>Odio nullam varius turpis et</a:t>
+                        <a:t>Odio nullam varius turpis</a:t>
                       </a:r>
                       <a:endParaRPr lang="en-US" sz="1350" dirty="0">
                         <a:latin typeface="Hanken Grotesk" charset="0"/>
@@ -6234,7 +6234,7 @@
                       </a:endParaRPr>
                     </a:p>
                   </a:txBody>
-                  <a:tcPr marL="137160" marR="137160" marT="0" marB="0" anchor="ctr">
+                  <a:tcPr marL="182880" marR="182880" marT="0" marB="0" anchor="ctr">
                     <a:lnL w="9525" cap="flat" cmpd="sng" algn="ctr">
                       <a:solidFill>
                         <a:srgbClr val="D9D9D6"/>
@@ -6302,7 +6302,7 @@
                       </a:endParaRPr>
                     </a:p>
                   </a:txBody>
-                  <a:tcPr marL="137160" marR="137160" marT="0" marB="0" anchor="ctr">
+                  <a:tcPr marL="182880" marR="182880" marT="0" marB="0" anchor="ctr">
                     <a:lnL w="9525" cap="flat" cmpd="sng" algn="ctr">
                       <a:solidFill>
                         <a:srgbClr val="D9D9D6"/>
@@ -6370,7 +6370,7 @@
                       </a:endParaRPr>
                     </a:p>
                   </a:txBody>
-                  <a:tcPr marL="137160" marR="137160" marT="0" marB="0" anchor="ctr">
+                  <a:tcPr marL="182880" marR="182880" marT="0" marB="0" anchor="ctr">
                     <a:lnL w="9525" cap="flat" cmpd="sng" algn="ctr">
                       <a:solidFill>
                         <a:srgbClr val="D9D9D6"/>
@@ -6413,7 +6413,7 @@
                   </a:tcPr>
                 </a:tc>
               </a:tr>
-              <a:tr h="777240">
+              <a:tr h="722376">
                 <a:tc>
                   <a:txBody>
                     <a:bodyPr/>
@@ -6440,7 +6440,7 @@
                       </a:endParaRPr>
                     </a:p>
                   </a:txBody>
-                  <a:tcPr marL="137160" marR="137160" marT="0" marB="0" anchor="ctr">
+                  <a:tcPr marL="182880" marR="182880" marT="0" marB="0" anchor="ctr">
                     <a:lnL w="9525" cap="flat" cmpd="sng" algn="ctr">
                       <a:solidFill>
                         <a:srgbClr val="D9D9D6"/>
@@ -6499,7 +6499,7 @@
                           <a:ea typeface="Hanken Grotesk" pitchFamily="34" charset="-122"/>
                           <a:cs typeface="Hanken Grotesk" pitchFamily="34" charset="-120"/>
                         </a:rPr>
-                        <a:t>Amet consectetur adipiscing elit sed</a:t>
+                        <a:t>Amet consectetur adipiscing elit</a:t>
                       </a:r>
                       <a:endParaRPr lang="en-US" sz="1350" dirty="0">
                         <a:latin typeface="Hanken Grotesk" charset="0"/>
@@ -6508,7 +6508,7 @@
                       </a:endParaRPr>
                     </a:p>
                   </a:txBody>
-                  <a:tcPr marL="137160" marR="137160" marT="0" marB="0" anchor="ctr">
+                  <a:tcPr marL="182880" marR="182880" marT="0" marB="0" anchor="ctr">
                     <a:lnL w="9525" cap="flat" cmpd="sng" algn="ctr">
                       <a:solidFill>
                         <a:srgbClr val="D9D9D6"/>
@@ -6576,7 +6576,7 @@
                       </a:endParaRPr>
                     </a:p>
                   </a:txBody>
-                  <a:tcPr marL="137160" marR="137160" marT="0" marB="0" anchor="ctr">
+                  <a:tcPr marL="182880" marR="182880" marT="0" marB="0" anchor="ctr">
                     <a:lnL w="9525" cap="flat" cmpd="sng" algn="ctr">
                       <a:solidFill>
                         <a:srgbClr val="D9D9D6"/>
@@ -6644,7 +6644,7 @@
                       </a:endParaRPr>
                     </a:p>
                   </a:txBody>
-                  <a:tcPr marL="137160" marR="137160" marT="0" marB="0" anchor="ctr">
+                  <a:tcPr marL="182880" marR="182880" marT="0" marB="0" anchor="ctr">
                     <a:lnL w="9525" cap="flat" cmpd="sng" algn="ctr">
                       <a:solidFill>
                         <a:srgbClr val="D9D9D6"/>
@@ -6687,7 +6687,7 @@
                   </a:tcPr>
                 </a:tc>
               </a:tr>
-              <a:tr h="777240">
+              <a:tr h="722376">
                 <a:tc>
                   <a:txBody>
                     <a:bodyPr/>
@@ -6714,7 +6714,7 @@
                       </a:endParaRPr>
                     </a:p>
                   </a:txBody>
-                  <a:tcPr marL="137160" marR="137160" marT="0" marB="0" anchor="ctr">
+                  <a:tcPr marL="182880" marR="182880" marT="0" marB="0" anchor="ctr">
                     <a:lnL w="9525" cap="flat" cmpd="sng" algn="ctr">
                       <a:solidFill>
                         <a:srgbClr val="D9D9D6"/>
@@ -6773,7 +6773,7 @@
                           <a:ea typeface="Hanken Grotesk" pitchFamily="34" charset="-122"/>
                           <a:cs typeface="Hanken Grotesk" pitchFamily="34" charset="-120"/>
                         </a:rPr>
-                        <a:t>Ex ea commodo consequat duis</a:t>
+                        <a:t>Ex ea commodo consequat</a:t>
                       </a:r>
                       <a:endParaRPr lang="en-US" sz="1350" dirty="0">
                         <a:latin typeface="Hanken Grotesk" charset="0"/>
@@ -6782,7 +6782,7 @@
                       </a:endParaRPr>
                     </a:p>
                   </a:txBody>
-                  <a:tcPr marL="137160" marR="137160" marT="0" marB="0" anchor="ctr">
+                  <a:tcPr marL="182880" marR="182880" marT="0" marB="0" anchor="ctr">
                     <a:lnL w="9525" cap="flat" cmpd="sng" algn="ctr">
                       <a:solidFill>
                         <a:srgbClr val="D9D9D6"/>
@@ -6850,7 +6850,7 @@
                       </a:endParaRPr>
                     </a:p>
                   </a:txBody>
-                  <a:tcPr marL="137160" marR="137160" marT="0" marB="0" anchor="ctr">
+                  <a:tcPr marL="182880" marR="182880" marT="0" marB="0" anchor="ctr">
                     <a:lnL w="9525" cap="flat" cmpd="sng" algn="ctr">
                       <a:solidFill>
                         <a:srgbClr val="D9D9D6"/>
@@ -6918,7 +6918,7 @@
                       </a:endParaRPr>
                     </a:p>
                   </a:txBody>
-                  <a:tcPr marL="137160" marR="137160" marT="0" marB="0" anchor="ctr">
+                  <a:tcPr marL="182880" marR="182880" marT="0" marB="0" anchor="ctr">
                     <a:lnL w="9525" cap="flat" cmpd="sng" algn="ctr">
                       <a:solidFill>
                         <a:srgbClr val="D9D9D6"/>
@@ -7005,8 +7005,8 @@
         </p:nvSpPr>
         <p:spPr>
           <a:xfrm>
-            <a:off x="457200" y="384048"/>
-            <a:ext cx="8961120" cy="274320"/>
+            <a:off x="685800" y="502920"/>
+            <a:ext cx="8595360" cy="274320"/>
           </a:xfrm>
           <a:prstGeom prst="rect">
             <a:avLst/>
@@ -7044,8 +7044,8 @@
         </p:nvSpPr>
         <p:spPr>
           <a:xfrm>
-            <a:off x="457200" y="676656"/>
-            <a:ext cx="11274552" cy="868680"/>
+            <a:off x="685800" y="804672"/>
+            <a:ext cx="10820095" cy="566928"/>
           </a:xfrm>
           <a:prstGeom prst="rect">
             <a:avLst/>
@@ -7064,7 +7064,7 @@
               <a:buNone/>
             </a:pPr>
             <a:r>
-              <a:rPr lang="en-US" sz="3000" b="1" dirty="0">
+              <a:rPr lang="en-US" sz="2800" b="1" dirty="0">
                 <a:solidFill>
                   <a:srgbClr val="222731"/>
                 </a:solidFill>
@@ -7074,7 +7074,7 @@
               </a:rPr>
               <a:t>Two ways to turn this template into your deck</a:t>
             </a:r>
-            <a:endParaRPr lang="en-US" sz="3000" dirty="0"/>
+            <a:endParaRPr lang="en-US" sz="2800" dirty="0"/>
           </a:p>
         </p:txBody>
       </p:sp>
@@ -7086,7 +7086,7 @@
         </p:nvSpPr>
         <p:spPr>
           <a:xfrm>
-            <a:off x="457200" y="6400800"/>
+            <a:off x="685800" y="6400800"/>
             <a:ext cx="4389120" cy="256032"/>
           </a:xfrm>
           <a:prstGeom prst="rect">
@@ -7126,7 +7126,7 @@
         <p:spPr>
           <a:xfrm>
             <a:off x="4937760" y="6400800"/>
-            <a:ext cx="5943600" cy="256032"/>
+            <a:ext cx="5790895" cy="256032"/>
           </a:xfrm>
           <a:prstGeom prst="rect">
             <a:avLst/>
@@ -7164,7 +7164,7 @@
         </p:nvSpPr>
         <p:spPr>
           <a:xfrm>
-            <a:off x="11091672" y="6400800"/>
+            <a:off x="10865815" y="6400800"/>
             <a:ext cx="640080" cy="256032"/>
           </a:xfrm>
           <a:prstGeom prst="rect">
@@ -7203,12 +7203,12 @@
         </p:nvSpPr>
         <p:spPr>
           <a:xfrm>
-            <a:off x="457200" y="1783080"/>
-            <a:ext cx="4754880" cy="2011680"/>
+            <a:off x="685800" y="1691640"/>
+            <a:ext cx="4754880" cy="1828800"/>
           </a:xfrm>
           <a:prstGeom prst="roundRect">
             <a:avLst>
-              <a:gd name="adj" fmla="val 5455"/>
+              <a:gd name="adj" fmla="val 6000"/>
             </a:avLst>
           </a:prstGeom>
           <a:solidFill>
@@ -7230,8 +7230,8 @@
         </p:nvSpPr>
         <p:spPr>
           <a:xfrm>
-            <a:off x="731520" y="2011680"/>
-            <a:ext cx="4206240" cy="274320"/>
+            <a:off x="1051560" y="1984248"/>
+            <a:ext cx="4023360" cy="274320"/>
           </a:xfrm>
           <a:prstGeom prst="rect">
             <a:avLst/>
@@ -7269,8 +7269,8 @@
         </p:nvSpPr>
         <p:spPr>
           <a:xfrm>
-            <a:off x="731520" y="2331720"/>
-            <a:ext cx="4206240" cy="1371600"/>
+            <a:off x="1051560" y="2331720"/>
+            <a:ext cx="4023360" cy="1097280"/>
           </a:xfrm>
           <a:prstGeom prst="rect">
             <a:avLst/>
@@ -7284,13 +7284,13 @@
           <a:p>
             <a:pPr marL="342900" indent="-342900">
               <a:spcAft>
-                <a:spcPts val="500"/>
+                <a:spcPts val="400"/>
               </a:spcAft>
               <a:buSzPct val="100000"/>
               <a:buChar char="•"/>
             </a:pPr>
             <a:r>
-              <a:rPr lang="en-US" sz="1350" dirty="0">
+              <a:rPr lang="en-US" sz="1300" dirty="0">
                 <a:solidFill>
                   <a:srgbClr val="222731"/>
                 </a:solidFill>
@@ -7300,18 +7300,18 @@
               </a:rPr>
               <a:t>Replace every lorem ipsum line and dummy number with your content.</a:t>
             </a:r>
-            <a:endParaRPr lang="en-US" sz="1350" dirty="0"/>
+            <a:endParaRPr lang="en-US" sz="1300" dirty="0"/>
           </a:p>
           <a:p>
             <a:pPr marL="342900" indent="-342900">
               <a:spcAft>
-                <a:spcPts val="500"/>
+                <a:spcPts val="400"/>
               </a:spcAft>
               <a:buSzPct val="100000"/>
               <a:buChar char="•"/>
             </a:pPr>
             <a:r>
-              <a:rPr lang="en-US" sz="1350" dirty="0">
+              <a:rPr lang="en-US" sz="1300" dirty="0">
                 <a:solidFill>
                   <a:srgbClr val="222731"/>
                 </a:solidFill>
@@ -7321,18 +7321,18 @@
               </a:rPr>
               <a:t>Keep the layouts. Delete slides you have no evidence for.</a:t>
             </a:r>
-            <a:endParaRPr lang="en-US" sz="1350" dirty="0"/>
+            <a:endParaRPr lang="en-US" sz="1300" dirty="0"/>
           </a:p>
           <a:p>
             <a:pPr marL="342900" indent="-342900">
               <a:spcAft>
-                <a:spcPts val="500"/>
+                <a:spcPts val="400"/>
               </a:spcAft>
               <a:buSzPct val="100000"/>
               <a:buChar char="•"/>
             </a:pPr>
             <a:r>
-              <a:rPr lang="en-US" sz="1350" dirty="0">
+              <a:rPr lang="en-US" sz="1300" dirty="0">
                 <a:solidFill>
                   <a:srgbClr val="222731"/>
                 </a:solidFill>
@@ -7342,7 +7342,7 @@
               </a:rPr>
               <a:t>Put real screenshots behind the grey phone screens.</a:t>
             </a:r>
-            <a:endParaRPr lang="en-US" sz="1350" dirty="0"/>
+            <a:endParaRPr lang="en-US" sz="1300" dirty="0"/>
           </a:p>
         </p:txBody>
       </p:sp>
@@ -7354,12 +7354,12 @@
         </p:nvSpPr>
         <p:spPr>
           <a:xfrm>
-            <a:off x="457200" y="3977640"/>
-            <a:ext cx="4754880" cy="2148840"/>
+            <a:off x="685800" y="3794760"/>
+            <a:ext cx="4754880" cy="1965960"/>
           </a:xfrm>
           <a:prstGeom prst="roundRect">
             <a:avLst>
-              <a:gd name="adj" fmla="val 5106"/>
+              <a:gd name="adj" fmla="val 5581"/>
             </a:avLst>
           </a:prstGeom>
           <a:solidFill>
@@ -7381,8 +7381,8 @@
         </p:nvSpPr>
         <p:spPr>
           <a:xfrm>
-            <a:off x="731520" y="4206240"/>
-            <a:ext cx="4206240" cy="274320"/>
+            <a:off x="1051560" y="4087368"/>
+            <a:ext cx="4023360" cy="274320"/>
           </a:xfrm>
           <a:prstGeom prst="rect">
             <a:avLst/>
@@ -7406,7 +7406,7 @@
                 <a:ea typeface="Hanken Grotesk" pitchFamily="34" charset="-122"/>
                 <a:cs typeface="Hanken Grotesk" pitchFamily="34" charset="-120"/>
               </a:rPr>
-              <a:t>OPTION B · USE YOUR AI TOOL</a:t>
+              <a:t>OPTION B · USE CLAUDE</a:t>
             </a:r>
             <a:endParaRPr lang="en-US" sz="1050" dirty="0"/>
           </a:p>
@@ -7420,8 +7420,8 @@
         </p:nvSpPr>
         <p:spPr>
           <a:xfrm>
-            <a:off x="731520" y="4526280"/>
-            <a:ext cx="4206240" cy="274320"/>
+            <a:off x="1051560" y="4416552"/>
+            <a:ext cx="4023360" cy="274320"/>
           </a:xfrm>
           <a:prstGeom prst="rect">
             <a:avLst/>
@@ -7445,7 +7445,7 @@
                 <a:ea typeface="Hanken Grotesk" pitchFamily="34" charset="-122"/>
                 <a:cs typeface="Hanken Grotesk" pitchFamily="34" charset="-120"/>
               </a:rPr>
-              <a:t>Attach cx-presentation-system.md, then write:</a:t>
+              <a:t>Attach the Storyloom spec, then write:</a:t>
             </a:r>
             <a:endParaRPr lang="en-US" sz="1350" dirty="0"/>
           </a:p>
@@ -7459,12 +7459,12 @@
         </p:nvSpPr>
         <p:spPr>
           <a:xfrm>
-            <a:off x="731520" y="4846320"/>
-            <a:ext cx="4206240" cy="1097280"/>
+            <a:off x="1051560" y="4782312"/>
+            <a:ext cx="4023360" cy="704088"/>
           </a:xfrm>
           <a:prstGeom prst="roundRect">
             <a:avLst>
-              <a:gd name="adj" fmla="val 6667"/>
+              <a:gd name="adj" fmla="val 10390"/>
             </a:avLst>
           </a:prstGeom>
           <a:solidFill>
@@ -7486,8 +7486,8 @@
         </p:nvSpPr>
         <p:spPr>
           <a:xfrm>
-            <a:off x="868680" y="4892040"/>
-            <a:ext cx="3931920" cy="1005840"/>
+            <a:off x="1188720" y="4782312"/>
+            <a:ext cx="3749040" cy="704088"/>
           </a:xfrm>
           <a:prstGeom prst="rect">
             <a:avLst/>
@@ -7525,8 +7525,8 @@
         </p:nvSpPr>
         <p:spPr>
           <a:xfrm>
-            <a:off x="5577840" y="1783080"/>
-            <a:ext cx="6156655" cy="274320"/>
+            <a:off x="5989320" y="1691640"/>
+            <a:ext cx="5516575" cy="274320"/>
           </a:xfrm>
           <a:prstGeom prst="rect">
             <a:avLst/>
@@ -7564,8 +7564,8 @@
         </p:nvSpPr>
         <p:spPr>
           <a:xfrm>
-            <a:off x="5577840" y="2148840"/>
-            <a:ext cx="411480" cy="329184"/>
+            <a:off x="5989320" y="2075688"/>
+            <a:ext cx="411480" cy="311727"/>
           </a:xfrm>
           <a:prstGeom prst="rect">
             <a:avLst/>
@@ -7603,8 +7603,8 @@
         </p:nvSpPr>
         <p:spPr>
           <a:xfrm>
-            <a:off x="6035040" y="2148840"/>
-            <a:ext cx="3322015" cy="329184"/>
+            <a:off x="6446520" y="2075688"/>
+            <a:ext cx="2681935" cy="311727"/>
           </a:xfrm>
           <a:prstGeom prst="rect">
             <a:avLst/>
@@ -7642,8 +7642,8 @@
         </p:nvSpPr>
         <p:spPr>
           <a:xfrm>
-            <a:off x="9402775" y="2148840"/>
-            <a:ext cx="2331720" cy="329184"/>
+            <a:off x="9174175" y="2075688"/>
+            <a:ext cx="2331720" cy="311727"/>
           </a:xfrm>
           <a:prstGeom prst="rect">
             <a:avLst/>
@@ -7681,8 +7681,8 @@
         </p:nvSpPr>
         <p:spPr>
           <a:xfrm>
-            <a:off x="5577840" y="2478024"/>
-            <a:ext cx="6156655" cy="0"/>
+            <a:off x="5989320" y="2387415"/>
+            <a:ext cx="5516575" cy="0"/>
           </a:xfrm>
           <a:prstGeom prst="line">
             <a:avLst/>
@@ -7704,8 +7704,8 @@
         </p:nvSpPr>
         <p:spPr>
           <a:xfrm>
-            <a:off x="5577840" y="2478024"/>
-            <a:ext cx="411480" cy="329184"/>
+            <a:off x="5989320" y="2387415"/>
+            <a:ext cx="411480" cy="311727"/>
           </a:xfrm>
           <a:prstGeom prst="rect">
             <a:avLst/>
@@ -7743,8 +7743,8 @@
         </p:nvSpPr>
         <p:spPr>
           <a:xfrm>
-            <a:off x="6035040" y="2478024"/>
-            <a:ext cx="3322015" cy="329184"/>
+            <a:off x="6446520" y="2387415"/>
+            <a:ext cx="2681935" cy="311727"/>
           </a:xfrm>
           <a:prstGeom prst="rect">
             <a:avLst/>
@@ -7782,8 +7782,8 @@
         </p:nvSpPr>
         <p:spPr>
           <a:xfrm>
-            <a:off x="9402775" y="2478024"/>
-            <a:ext cx="2331720" cy="329184"/>
+            <a:off x="9174175" y="2387415"/>
+            <a:ext cx="2331720" cy="311727"/>
           </a:xfrm>
           <a:prstGeom prst="rect">
             <a:avLst/>
@@ -7821,8 +7821,8 @@
         </p:nvSpPr>
         <p:spPr>
           <a:xfrm>
-            <a:off x="5577840" y="2807208"/>
-            <a:ext cx="6156655" cy="0"/>
+            <a:off x="5989320" y="2699143"/>
+            <a:ext cx="5516575" cy="0"/>
           </a:xfrm>
           <a:prstGeom prst="line">
             <a:avLst/>
@@ -7844,8 +7844,8 @@
         </p:nvSpPr>
         <p:spPr>
           <a:xfrm>
-            <a:off x="5577840" y="2807208"/>
-            <a:ext cx="411480" cy="329184"/>
+            <a:off x="5989320" y="2699143"/>
+            <a:ext cx="411480" cy="311727"/>
           </a:xfrm>
           <a:prstGeom prst="rect">
             <a:avLst/>
@@ -7883,8 +7883,8 @@
         </p:nvSpPr>
         <p:spPr>
           <a:xfrm>
-            <a:off x="6035040" y="2807208"/>
-            <a:ext cx="3322015" cy="329184"/>
+            <a:off x="6446520" y="2699143"/>
+            <a:ext cx="2681935" cy="311727"/>
           </a:xfrm>
           <a:prstGeom prst="rect">
             <a:avLst/>
@@ -7922,8 +7922,8 @@
         </p:nvSpPr>
         <p:spPr>
           <a:xfrm>
-            <a:off x="9402775" y="2807208"/>
-            <a:ext cx="2331720" cy="329184"/>
+            <a:off x="9174175" y="2699143"/>
+            <a:ext cx="2331720" cy="311727"/>
           </a:xfrm>
           <a:prstGeom prst="rect">
             <a:avLst/>
@@ -7961,8 +7961,8 @@
         </p:nvSpPr>
         <p:spPr>
           <a:xfrm>
-            <a:off x="5577840" y="3136392"/>
-            <a:ext cx="6156655" cy="0"/>
+            <a:off x="5989320" y="3010870"/>
+            <a:ext cx="5516575" cy="0"/>
           </a:xfrm>
           <a:prstGeom prst="line">
             <a:avLst/>
@@ -7984,8 +7984,8 @@
         </p:nvSpPr>
         <p:spPr>
           <a:xfrm>
-            <a:off x="5577840" y="3136392"/>
-            <a:ext cx="411480" cy="329184"/>
+            <a:off x="5989320" y="3010870"/>
+            <a:ext cx="411480" cy="311727"/>
           </a:xfrm>
           <a:prstGeom prst="rect">
             <a:avLst/>
@@ -8023,8 +8023,8 @@
         </p:nvSpPr>
         <p:spPr>
           <a:xfrm>
-            <a:off x="6035040" y="3136392"/>
-            <a:ext cx="3322015" cy="329184"/>
+            <a:off x="6446520" y="3010870"/>
+            <a:ext cx="2681935" cy="311727"/>
           </a:xfrm>
           <a:prstGeom prst="rect">
             <a:avLst/>
@@ -8062,8 +8062,8 @@
         </p:nvSpPr>
         <p:spPr>
           <a:xfrm>
-            <a:off x="9402775" y="3136392"/>
-            <a:ext cx="2331720" cy="329184"/>
+            <a:off x="9174175" y="3010870"/>
+            <a:ext cx="2331720" cy="311727"/>
           </a:xfrm>
           <a:prstGeom prst="rect">
             <a:avLst/>
@@ -8101,8 +8101,8 @@
         </p:nvSpPr>
         <p:spPr>
           <a:xfrm>
-            <a:off x="5577840" y="3465576"/>
-            <a:ext cx="6156655" cy="0"/>
+            <a:off x="5989320" y="3322597"/>
+            <a:ext cx="5516575" cy="0"/>
           </a:xfrm>
           <a:prstGeom prst="line">
             <a:avLst/>
@@ -8124,8 +8124,8 @@
         </p:nvSpPr>
         <p:spPr>
           <a:xfrm>
-            <a:off x="5577840" y="3465576"/>
-            <a:ext cx="411480" cy="329184"/>
+            <a:off x="5989320" y="3322597"/>
+            <a:ext cx="411480" cy="311727"/>
           </a:xfrm>
           <a:prstGeom prst="rect">
             <a:avLst/>
@@ -8163,8 +8163,8 @@
         </p:nvSpPr>
         <p:spPr>
           <a:xfrm>
-            <a:off x="6035040" y="3465576"/>
-            <a:ext cx="3322015" cy="329184"/>
+            <a:off x="6446520" y="3322597"/>
+            <a:ext cx="2681935" cy="311727"/>
           </a:xfrm>
           <a:prstGeom prst="rect">
             <a:avLst/>
@@ -8202,8 +8202,8 @@
         </p:nvSpPr>
         <p:spPr>
           <a:xfrm>
-            <a:off x="9402775" y="3465576"/>
-            <a:ext cx="2331720" cy="329184"/>
+            <a:off x="9174175" y="3322597"/>
+            <a:ext cx="2331720" cy="311727"/>
           </a:xfrm>
           <a:prstGeom prst="rect">
             <a:avLst/>
@@ -8241,8 +8241,8 @@
         </p:nvSpPr>
         <p:spPr>
           <a:xfrm>
-            <a:off x="5577840" y="3794760"/>
-            <a:ext cx="6156655" cy="0"/>
+            <a:off x="5989320" y="3634324"/>
+            <a:ext cx="5516575" cy="0"/>
           </a:xfrm>
           <a:prstGeom prst="line">
             <a:avLst/>
@@ -8264,8 +8264,8 @@
         </p:nvSpPr>
         <p:spPr>
           <a:xfrm>
-            <a:off x="5577840" y="3794760"/>
-            <a:ext cx="411480" cy="329184"/>
+            <a:off x="5989320" y="3634324"/>
+            <a:ext cx="411480" cy="311727"/>
           </a:xfrm>
           <a:prstGeom prst="rect">
             <a:avLst/>
@@ -8303,8 +8303,8 @@
         </p:nvSpPr>
         <p:spPr>
           <a:xfrm>
-            <a:off x="6035040" y="3794760"/>
-            <a:ext cx="3322015" cy="329184"/>
+            <a:off x="6446520" y="3634324"/>
+            <a:ext cx="2681935" cy="311727"/>
           </a:xfrm>
           <a:prstGeom prst="rect">
             <a:avLst/>
@@ -8342,8 +8342,8 @@
         </p:nvSpPr>
         <p:spPr>
           <a:xfrm>
-            <a:off x="9402775" y="3794760"/>
-            <a:ext cx="2331720" cy="329184"/>
+            <a:off x="9174175" y="3634324"/>
+            <a:ext cx="2331720" cy="311727"/>
           </a:xfrm>
           <a:prstGeom prst="rect">
             <a:avLst/>
@@ -8381,8 +8381,8 @@
         </p:nvSpPr>
         <p:spPr>
           <a:xfrm>
-            <a:off x="5577840" y="4123944"/>
-            <a:ext cx="6156655" cy="0"/>
+            <a:off x="5989320" y="3946052"/>
+            <a:ext cx="5516575" cy="0"/>
           </a:xfrm>
           <a:prstGeom prst="line">
             <a:avLst/>
@@ -8404,8 +8404,8 @@
         </p:nvSpPr>
         <p:spPr>
           <a:xfrm>
-            <a:off x="5577840" y="4123944"/>
-            <a:ext cx="411480" cy="329184"/>
+            <a:off x="5989320" y="3946052"/>
+            <a:ext cx="411480" cy="311727"/>
           </a:xfrm>
           <a:prstGeom prst="rect">
             <a:avLst/>
@@ -8443,8 +8443,8 @@
         </p:nvSpPr>
         <p:spPr>
           <a:xfrm>
-            <a:off x="6035040" y="4123944"/>
-            <a:ext cx="3322015" cy="329184"/>
+            <a:off x="6446520" y="3946052"/>
+            <a:ext cx="2681935" cy="311727"/>
           </a:xfrm>
           <a:prstGeom prst="rect">
             <a:avLst/>
@@ -8482,8 +8482,8 @@
         </p:nvSpPr>
         <p:spPr>
           <a:xfrm>
-            <a:off x="9402775" y="4123944"/>
-            <a:ext cx="2331720" cy="329184"/>
+            <a:off x="9174175" y="3946052"/>
+            <a:ext cx="2331720" cy="311727"/>
           </a:xfrm>
           <a:prstGeom prst="rect">
             <a:avLst/>
@@ -8521,8 +8521,8 @@
         </p:nvSpPr>
         <p:spPr>
           <a:xfrm>
-            <a:off x="5577840" y="4453128"/>
-            <a:ext cx="6156655" cy="0"/>
+            <a:off x="5989320" y="4257779"/>
+            <a:ext cx="5516575" cy="0"/>
           </a:xfrm>
           <a:prstGeom prst="line">
             <a:avLst/>
@@ -8544,8 +8544,8 @@
         </p:nvSpPr>
         <p:spPr>
           <a:xfrm>
-            <a:off x="5577840" y="4453128"/>
-            <a:ext cx="411480" cy="329184"/>
+            <a:off x="5989320" y="4257779"/>
+            <a:ext cx="411480" cy="311727"/>
           </a:xfrm>
           <a:prstGeom prst="rect">
             <a:avLst/>
@@ -8583,8 +8583,8 @@
         </p:nvSpPr>
         <p:spPr>
           <a:xfrm>
-            <a:off x="6035040" y="4453128"/>
-            <a:ext cx="3322015" cy="329184"/>
+            <a:off x="6446520" y="4257779"/>
+            <a:ext cx="2681935" cy="311727"/>
           </a:xfrm>
           <a:prstGeom prst="rect">
             <a:avLst/>
@@ -8622,8 +8622,8 @@
         </p:nvSpPr>
         <p:spPr>
           <a:xfrm>
-            <a:off x="9402775" y="4453128"/>
-            <a:ext cx="2331720" cy="329184"/>
+            <a:off x="9174175" y="4257779"/>
+            <a:ext cx="2331720" cy="311727"/>
           </a:xfrm>
           <a:prstGeom prst="rect">
             <a:avLst/>
@@ -8661,8 +8661,8 @@
         </p:nvSpPr>
         <p:spPr>
           <a:xfrm>
-            <a:off x="5577840" y="4782312"/>
-            <a:ext cx="6156655" cy="0"/>
+            <a:off x="5989320" y="4569506"/>
+            <a:ext cx="5516575" cy="0"/>
           </a:xfrm>
           <a:prstGeom prst="line">
             <a:avLst/>
@@ -8684,8 +8684,8 @@
         </p:nvSpPr>
         <p:spPr>
           <a:xfrm>
-            <a:off x="5577840" y="4782312"/>
-            <a:ext cx="411480" cy="329184"/>
+            <a:off x="5989320" y="4569506"/>
+            <a:ext cx="411480" cy="311727"/>
           </a:xfrm>
           <a:prstGeom prst="rect">
             <a:avLst/>
@@ -8723,8 +8723,8 @@
         </p:nvSpPr>
         <p:spPr>
           <a:xfrm>
-            <a:off x="6035040" y="4782312"/>
-            <a:ext cx="3322015" cy="329184"/>
+            <a:off x="6446520" y="4569506"/>
+            <a:ext cx="2681935" cy="311727"/>
           </a:xfrm>
           <a:prstGeom prst="rect">
             <a:avLst/>
@@ -8762,8 +8762,8 @@
         </p:nvSpPr>
         <p:spPr>
           <a:xfrm>
-            <a:off x="9402775" y="4782312"/>
-            <a:ext cx="2331720" cy="329184"/>
+            <a:off x="9174175" y="4569506"/>
+            <a:ext cx="2331720" cy="311727"/>
           </a:xfrm>
           <a:prstGeom prst="rect">
             <a:avLst/>
@@ -8801,8 +8801,8 @@
         </p:nvSpPr>
         <p:spPr>
           <a:xfrm>
-            <a:off x="5577840" y="5111496"/>
-            <a:ext cx="6156655" cy="0"/>
+            <a:off x="5989320" y="4881233"/>
+            <a:ext cx="5516575" cy="0"/>
           </a:xfrm>
           <a:prstGeom prst="line">
             <a:avLst/>
@@ -8824,8 +8824,8 @@
         </p:nvSpPr>
         <p:spPr>
           <a:xfrm>
-            <a:off x="5577840" y="5111496"/>
-            <a:ext cx="411480" cy="329184"/>
+            <a:off x="5989320" y="4881233"/>
+            <a:ext cx="411480" cy="311727"/>
           </a:xfrm>
           <a:prstGeom prst="rect">
             <a:avLst/>
@@ -8863,8 +8863,8 @@
         </p:nvSpPr>
         <p:spPr>
           <a:xfrm>
-            <a:off x="6035040" y="5111496"/>
-            <a:ext cx="3322015" cy="329184"/>
+            <a:off x="6446520" y="4881233"/>
+            <a:ext cx="2681935" cy="311727"/>
           </a:xfrm>
           <a:prstGeom prst="rect">
             <a:avLst/>
@@ -8902,8 +8902,8 @@
         </p:nvSpPr>
         <p:spPr>
           <a:xfrm>
-            <a:off x="9402775" y="5111496"/>
-            <a:ext cx="2331720" cy="329184"/>
+            <a:off x="9174175" y="4881233"/>
+            <a:ext cx="2331720" cy="311727"/>
           </a:xfrm>
           <a:prstGeom prst="rect">
             <a:avLst/>
@@ -8941,8 +8941,8 @@
         </p:nvSpPr>
         <p:spPr>
           <a:xfrm>
-            <a:off x="5577840" y="5440680"/>
-            <a:ext cx="6156655" cy="0"/>
+            <a:off x="5989320" y="5192961"/>
+            <a:ext cx="5516575" cy="0"/>
           </a:xfrm>
           <a:prstGeom prst="line">
             <a:avLst/>
@@ -8964,8 +8964,8 @@
         </p:nvSpPr>
         <p:spPr>
           <a:xfrm>
-            <a:off x="5577840" y="5440680"/>
-            <a:ext cx="411480" cy="329184"/>
+            <a:off x="5989320" y="5192961"/>
+            <a:ext cx="411480" cy="311727"/>
           </a:xfrm>
           <a:prstGeom prst="rect">
             <a:avLst/>
@@ -9003,8 +9003,8 @@
         </p:nvSpPr>
         <p:spPr>
           <a:xfrm>
-            <a:off x="6035040" y="5440680"/>
-            <a:ext cx="3322015" cy="329184"/>
+            <a:off x="6446520" y="5192961"/>
+            <a:ext cx="2681935" cy="311727"/>
           </a:xfrm>
           <a:prstGeom prst="rect">
             <a:avLst/>
@@ -9042,8 +9042,8 @@
         </p:nvSpPr>
         <p:spPr>
           <a:xfrm>
-            <a:off x="9402775" y="5440680"/>
-            <a:ext cx="2331720" cy="329184"/>
+            <a:off x="9174175" y="5192961"/>
+            <a:ext cx="2331720" cy="311727"/>
           </a:xfrm>
           <a:prstGeom prst="rect">
             <a:avLst/>
@@ -9081,8 +9081,8 @@
         </p:nvSpPr>
         <p:spPr>
           <a:xfrm>
-            <a:off x="5577840" y="6172200"/>
-            <a:ext cx="6156655" cy="228600"/>
+            <a:off x="5989320" y="5989320"/>
+            <a:ext cx="5516575" cy="256032"/>
           </a:xfrm>
           <a:prstGeom prst="rect">
             <a:avLst/>
@@ -9152,8 +9152,8 @@
         </p:nvSpPr>
         <p:spPr>
           <a:xfrm>
-            <a:off x="457200" y="384048"/>
-            <a:ext cx="8961120" cy="274320"/>
+            <a:off x="685800" y="502920"/>
+            <a:ext cx="8595360" cy="274320"/>
           </a:xfrm>
           <a:prstGeom prst="rect">
             <a:avLst/>
@@ -9191,8 +9191,8 @@
         </p:nvSpPr>
         <p:spPr>
           <a:xfrm>
-            <a:off x="457200" y="676656"/>
-            <a:ext cx="11274552" cy="868680"/>
+            <a:off x="685800" y="804672"/>
+            <a:ext cx="10820095" cy="566928"/>
           </a:xfrm>
           <a:prstGeom prst="rect">
             <a:avLst/>
@@ -9211,7 +9211,7 @@
               <a:buNone/>
             </a:pPr>
             <a:r>
-              <a:rPr lang="en-US" sz="3000" b="1" dirty="0">
+              <a:rPr lang="en-US" sz="2800" b="1" dirty="0">
                 <a:solidFill>
                   <a:srgbClr val="222731"/>
                 </a:solidFill>
@@ -9219,9 +9219,9 @@
                 <a:ea typeface="Bricolage Grotesque" pitchFamily="34" charset="-122"/>
                 <a:cs typeface="Bricolage Grotesque" pitchFamily="34" charset="-120"/>
               </a:rPr>
-              <a:t>Elit sed do eiusmod tempor incididunt ut labore et</a:t>
-            </a:r>
-            <a:endParaRPr lang="en-US" sz="3000" dirty="0"/>
+              <a:t>Elit sed do eiusmod tempor incididunt</a:t>
+            </a:r>
+            <a:endParaRPr lang="en-US" sz="2800" dirty="0"/>
           </a:p>
         </p:txBody>
       </p:sp>
@@ -9233,7 +9233,7 @@
         </p:nvSpPr>
         <p:spPr>
           <a:xfrm>
-            <a:off x="457200" y="6400800"/>
+            <a:off x="685800" y="6400800"/>
             <a:ext cx="4389120" cy="256032"/>
           </a:xfrm>
           <a:prstGeom prst="rect">
@@ -9273,7 +9273,7 @@
         <p:spPr>
           <a:xfrm>
             <a:off x="4937760" y="6400800"/>
-            <a:ext cx="5943600" cy="256032"/>
+            <a:ext cx="5790895" cy="256032"/>
           </a:xfrm>
           <a:prstGeom prst="rect">
             <a:avLst/>
@@ -9311,7 +9311,7 @@
         </p:nvSpPr>
         <p:spPr>
           <a:xfrm>
-            <a:off x="11091672" y="6400800"/>
+            <a:off x="10865815" y="6400800"/>
             <a:ext cx="640080" cy="256032"/>
           </a:xfrm>
           <a:prstGeom prst="rect">
@@ -9350,12 +9350,12 @@
         </p:nvSpPr>
         <p:spPr>
           <a:xfrm>
-            <a:off x="457200" y="1783080"/>
-            <a:ext cx="11277295" cy="3291840"/>
+            <a:off x="685800" y="1691640"/>
+            <a:ext cx="10820095" cy="2697480"/>
           </a:xfrm>
           <a:prstGeom prst="roundRect">
             <a:avLst>
-              <a:gd name="adj" fmla="val 3889"/>
+              <a:gd name="adj" fmla="val 4746"/>
             </a:avLst>
           </a:prstGeom>
           <a:solidFill>
@@ -9377,8 +9377,8 @@
         </p:nvSpPr>
         <p:spPr>
           <a:xfrm>
-            <a:off x="868680" y="2194560"/>
-            <a:ext cx="10454335" cy="2103120"/>
+            <a:off x="1143000" y="2057400"/>
+            <a:ext cx="9905695" cy="1965960"/>
           </a:xfrm>
           <a:prstGeom prst="rect">
             <a:avLst/>
@@ -9394,7 +9394,7 @@
               <a:buNone/>
             </a:pPr>
             <a:r>
-              <a:rPr lang="en-US" sz="3000" b="1" dirty="0">
+              <a:rPr lang="en-US" sz="2800" b="1" dirty="0">
                 <a:solidFill>
                   <a:srgbClr val="FFFFFF"/>
                 </a:solidFill>
@@ -9402,9 +9402,9 @@
                 <a:ea typeface="Bricolage Grotesque" pitchFamily="34" charset="-122"/>
                 <a:cs typeface="Bricolage Grotesque" pitchFamily="34" charset="-120"/>
               </a:rPr>
-              <a:t>Consequat duis aute irure dolor in reprehenderit in voluptate velit esse cillum dolore eu fugiat nulla pariatur excepteur sint occaecat.</a:t>
-            </a:r>
-            <a:endParaRPr lang="en-US" sz="3000" dirty="0"/>
+              <a:t>Consequat duis aute irure dolor in reprehenderit in voluptate velit esse cillum dolore eu fugiat.</a:t>
+            </a:r>
+            <a:endParaRPr lang="en-US" sz="2800" dirty="0"/>
           </a:p>
         </p:txBody>
       </p:sp>
@@ -9416,8 +9416,8 @@
         </p:nvSpPr>
         <p:spPr>
           <a:xfrm>
-            <a:off x="457200" y="5303520"/>
-            <a:ext cx="3576218" cy="274320"/>
+            <a:off x="685800" y="4754880"/>
+            <a:ext cx="3423818" cy="274320"/>
           </a:xfrm>
           <a:prstGeom prst="rect">
             <a:avLst/>
@@ -9455,8 +9455,8 @@
         </p:nvSpPr>
         <p:spPr>
           <a:xfrm>
-            <a:off x="457200" y="5577840"/>
-            <a:ext cx="3576218" cy="731520"/>
+            <a:off x="685800" y="5047488"/>
+            <a:ext cx="3423818" cy="713232"/>
           </a:xfrm>
           <a:prstGeom prst="rect">
             <a:avLst/>
@@ -9480,7 +9480,7 @@
                 <a:ea typeface="Hanken Grotesk" pitchFamily="34" charset="-122"/>
                 <a:cs typeface="Hanken Grotesk" pitchFamily="34" charset="-120"/>
               </a:rPr>
-              <a:t>Dolor in reprehenderit in voluptate velit esse cillum dolore eu fugiat nulla pariatur excepteur.</a:t>
+              <a:t>Dolor in reprehenderit in voluptate velit esse cillum dolore eu.</a:t>
             </a:r>
             <a:endParaRPr lang="en-US" sz="1350" dirty="0"/>
           </a:p>
@@ -9494,8 +9494,8 @@
         </p:nvSpPr>
         <p:spPr>
           <a:xfrm>
-            <a:off x="4307738" y="5303520"/>
-            <a:ext cx="3576218" cy="274320"/>
+            <a:off x="4383938" y="4754880"/>
+            <a:ext cx="3423818" cy="274320"/>
           </a:xfrm>
           <a:prstGeom prst="rect">
             <a:avLst/>
@@ -9533,8 +9533,8 @@
         </p:nvSpPr>
         <p:spPr>
           <a:xfrm>
-            <a:off x="4307738" y="5577840"/>
-            <a:ext cx="3576218" cy="731520"/>
+            <a:off x="4383938" y="5047488"/>
+            <a:ext cx="3423818" cy="713232"/>
           </a:xfrm>
           <a:prstGeom prst="rect">
             <a:avLst/>
@@ -9558,7 +9558,7 @@
                 <a:ea typeface="Hanken Grotesk" pitchFamily="34" charset="-122"/>
                 <a:cs typeface="Hanken Grotesk" pitchFamily="34" charset="-120"/>
               </a:rPr>
-              <a:t>Et commodo pharetra est eros bibendum elit nec luctus magna felis sollicitudin mauris integer.</a:t>
+              <a:t>Et commodo pharetra est eros bibendum elit nec luctus magna.</a:t>
             </a:r>
             <a:endParaRPr lang="en-US" sz="1350" dirty="0"/>
           </a:p>
@@ -9572,8 +9572,8 @@
         </p:nvSpPr>
         <p:spPr>
           <a:xfrm>
-            <a:off x="8158277" y="5303520"/>
-            <a:ext cx="3576218" cy="274320"/>
+            <a:off x="8082077" y="4754880"/>
+            <a:ext cx="3423818" cy="274320"/>
           </a:xfrm>
           <a:prstGeom prst="rect">
             <a:avLst/>
@@ -9611,8 +9611,8 @@
         </p:nvSpPr>
         <p:spPr>
           <a:xfrm>
-            <a:off x="8158277" y="5577840"/>
-            <a:ext cx="3576218" cy="731520"/>
+            <a:off x="8082077" y="5047488"/>
+            <a:ext cx="3423818" cy="713232"/>
           </a:xfrm>
           <a:prstGeom prst="rect">
             <a:avLst/>
@@ -9636,7 +9636,7 @@
                 <a:ea typeface="Hanken Grotesk" pitchFamily="34" charset="-122"/>
                 <a:cs typeface="Hanken Grotesk" pitchFamily="34" charset="-120"/>
               </a:rPr>
-              <a:t>Nisi ut aliquip ex ea commodo consequat duis aute irure dolor in reprehenderit in.</a:t>
+              <a:t>Nisi ut aliquip ex ea commodo consequat duis aute irure.</a:t>
             </a:r>
             <a:endParaRPr lang="en-US" sz="1350" dirty="0"/>
           </a:p>
@@ -9682,8 +9682,8 @@
         </p:nvSpPr>
         <p:spPr>
           <a:xfrm>
-            <a:off x="457200" y="384048"/>
-            <a:ext cx="8961120" cy="274320"/>
+            <a:off x="685800" y="502920"/>
+            <a:ext cx="8595360" cy="274320"/>
           </a:xfrm>
           <a:prstGeom prst="rect">
             <a:avLst/>
@@ -9721,8 +9721,8 @@
         </p:nvSpPr>
         <p:spPr>
           <a:xfrm>
-            <a:off x="457200" y="676656"/>
-            <a:ext cx="11274552" cy="868680"/>
+            <a:off x="685800" y="804672"/>
+            <a:ext cx="10820095" cy="566928"/>
           </a:xfrm>
           <a:prstGeom prst="rect">
             <a:avLst/>
@@ -9741,7 +9741,7 @@
               <a:buNone/>
             </a:pPr>
             <a:r>
-              <a:rPr lang="en-US" sz="3000" b="1" dirty="0">
+              <a:rPr lang="en-US" sz="2800" b="1" dirty="0">
                 <a:solidFill>
                   <a:srgbClr val="222731"/>
                 </a:solidFill>
@@ -9749,9 +9749,9 @@
                 <a:ea typeface="Bricolage Grotesque" pitchFamily="34" charset="-122"/>
                 <a:cs typeface="Bricolage Grotesque" pitchFamily="34" charset="-120"/>
               </a:rPr>
-              <a:t>Laboris nisi ut aliquip ex ea commodo consequat duis aute</a:t>
-            </a:r>
-            <a:endParaRPr lang="en-US" sz="3000" dirty="0"/>
+              <a:t>Laboris nisi ut aliquip ex ea commodo</a:t>
+            </a:r>
+            <a:endParaRPr lang="en-US" sz="2800" dirty="0"/>
           </a:p>
         </p:txBody>
       </p:sp>
@@ -9763,7 +9763,7 @@
         </p:nvSpPr>
         <p:spPr>
           <a:xfrm>
-            <a:off x="457200" y="6400800"/>
+            <a:off x="685800" y="6400800"/>
             <a:ext cx="4389120" cy="256032"/>
           </a:xfrm>
           <a:prstGeom prst="rect">
@@ -9803,7 +9803,7 @@
         <p:spPr>
           <a:xfrm>
             <a:off x="4937760" y="6400800"/>
-            <a:ext cx="5943600" cy="256032"/>
+            <a:ext cx="5790895" cy="256032"/>
           </a:xfrm>
           <a:prstGeom prst="rect">
             <a:avLst/>
@@ -9841,7 +9841,7 @@
         </p:nvSpPr>
         <p:spPr>
           <a:xfrm>
-            <a:off x="11091672" y="6400800"/>
+            <a:off x="10865815" y="6400800"/>
             <a:ext cx="640080" cy="256032"/>
           </a:xfrm>
           <a:prstGeom prst="rect">
@@ -9880,12 +9880,12 @@
         </p:nvSpPr>
         <p:spPr>
           <a:xfrm>
-            <a:off x="457200" y="1783080"/>
-            <a:ext cx="5120640" cy="4343400"/>
+            <a:off x="685800" y="1691640"/>
+            <a:ext cx="4846320" cy="4069080"/>
           </a:xfrm>
           <a:prstGeom prst="roundRect">
             <a:avLst>
-              <a:gd name="adj" fmla="val 2526"/>
+              <a:gd name="adj" fmla="val 2697"/>
             </a:avLst>
           </a:prstGeom>
           <a:solidFill>
@@ -9907,7 +9907,7 @@
         </p:nvSpPr>
         <p:spPr>
           <a:xfrm>
-            <a:off x="822960" y="2148840"/>
+            <a:off x="1051560" y="2057400"/>
             <a:ext cx="548640" cy="548640"/>
           </a:xfrm>
           <a:prstGeom prst="roundRect">
@@ -9942,7 +9942,7 @@
         </p:blipFill>
         <p:spPr>
           <a:xfrm>
-            <a:off x="932688" y="2258568"/>
+            <a:off x="1161288" y="2167128"/>
             <a:ext cx="329184" cy="329184"/>
           </a:xfrm>
           <a:prstGeom prst="rect">
@@ -9958,8 +9958,8 @@
         </p:nvSpPr>
         <p:spPr>
           <a:xfrm>
-            <a:off x="822960" y="2926080"/>
-            <a:ext cx="4389120" cy="274320"/>
+            <a:off x="1051560" y="2834640"/>
+            <a:ext cx="4114800" cy="274320"/>
           </a:xfrm>
           <a:prstGeom prst="rect">
             <a:avLst/>
@@ -9997,8 +9997,8 @@
         </p:nvSpPr>
         <p:spPr>
           <a:xfrm>
-            <a:off x="822960" y="3246120"/>
-            <a:ext cx="4389120" cy="1371600"/>
+            <a:off x="1051560" y="3154680"/>
+            <a:ext cx="4114800" cy="1280160"/>
           </a:xfrm>
           <a:prstGeom prst="rect">
             <a:avLst/>
@@ -10014,7 +10014,7 @@
               <a:buNone/>
             </a:pPr>
             <a:r>
-              <a:rPr lang="en-US" sz="2200" b="1" dirty="0">
+              <a:rPr lang="en-US" sz="2100" b="1" dirty="0">
                 <a:solidFill>
                   <a:srgbClr val="FFFFFF"/>
                 </a:solidFill>
@@ -10022,9 +10022,9 @@
                 <a:ea typeface="Bricolage Grotesque" pitchFamily="34" charset="-122"/>
                 <a:cs typeface="Bricolage Grotesque" pitchFamily="34" charset="-120"/>
               </a:rPr>
-              <a:t>Ad minim veniam quis nostrud exercitation ullamco laboris nisi ut aliquip ex ea commodo.</a:t>
-            </a:r>
-            <a:endParaRPr lang="en-US" sz="2200" dirty="0"/>
+              <a:t>Ad minim veniam quis nostrud exercitation ullamco laboris.</a:t>
+            </a:r>
+            <a:endParaRPr lang="en-US" sz="2100" dirty="0"/>
           </a:p>
         </p:txBody>
       </p:sp>
@@ -10036,8 +10036,8 @@
         </p:nvSpPr>
         <p:spPr>
           <a:xfrm>
-            <a:off x="822960" y="4800600"/>
-            <a:ext cx="4389120" cy="274320"/>
+            <a:off x="1051560" y="4617720"/>
+            <a:ext cx="4114800" cy="274320"/>
           </a:xfrm>
           <a:prstGeom prst="rect">
             <a:avLst/>
@@ -10075,8 +10075,8 @@
         </p:nvSpPr>
         <p:spPr>
           <a:xfrm>
-            <a:off x="822960" y="5102352"/>
-            <a:ext cx="4389120" cy="868680"/>
+            <a:off x="1051560" y="4937760"/>
+            <a:ext cx="4114800" cy="731520"/>
           </a:xfrm>
           <a:prstGeom prst="rect">
             <a:avLst/>
@@ -10100,7 +10100,7 @@
                 <a:ea typeface="Hanken Grotesk" pitchFamily="34" charset="-122"/>
                 <a:cs typeface="Hanken Grotesk" pitchFamily="34" charset="-120"/>
               </a:rPr>
-              <a:t>Est eros bibendum elit nec luctus magna felis sollicitudin mauris integer in mauris eu nibh euismod gravida lorem.</a:t>
+              <a:t>Est eros bibendum elit nec luctus magna felis sollicitudin mauris integer in.</a:t>
             </a:r>
             <a:endParaRPr lang="en-US" sz="1350" dirty="0"/>
           </a:p>
@@ -10114,12 +10114,12 @@
         </p:nvSpPr>
         <p:spPr>
           <a:xfrm>
-            <a:off x="5897880" y="1783080"/>
-            <a:ext cx="5836615" cy="1335024"/>
+            <a:off x="5806440" y="1691640"/>
+            <a:ext cx="5699455" cy="1173480"/>
           </a:xfrm>
           <a:prstGeom prst="roundRect">
             <a:avLst>
-              <a:gd name="adj" fmla="val 8219"/>
+              <a:gd name="adj" fmla="val 9351"/>
             </a:avLst>
           </a:prstGeom>
           <a:solidFill>
@@ -10141,8 +10141,8 @@
         </p:nvSpPr>
         <p:spPr>
           <a:xfrm>
-            <a:off x="6172200" y="1965960"/>
-            <a:ext cx="2011680" cy="685800"/>
+            <a:off x="6172200" y="1856232"/>
+            <a:ext cx="1828800" cy="640080"/>
           </a:xfrm>
           <a:prstGeom prst="rect">
             <a:avLst/>
@@ -10158,7 +10158,7 @@
               <a:buNone/>
             </a:pPr>
             <a:r>
-              <a:rPr lang="en-US" sz="3200" b="1" dirty="0">
+              <a:rPr lang="en-US" sz="3000" b="1" dirty="0">
                 <a:solidFill>
                   <a:srgbClr val="2E4AED"/>
                 </a:solidFill>
@@ -10168,7 +10168,7 @@
               </a:rPr>
               <a:t>1 in 3</a:t>
             </a:r>
-            <a:endParaRPr lang="en-US" sz="3200" dirty="0"/>
+            <a:endParaRPr lang="en-US" sz="3000" dirty="0"/>
           </a:p>
         </p:txBody>
       </p:sp>
@@ -10180,8 +10180,8 @@
         </p:nvSpPr>
         <p:spPr>
           <a:xfrm>
-            <a:off x="8275320" y="1984248"/>
-            <a:ext cx="3291840" cy="640080"/>
+            <a:off x="8183880" y="1856232"/>
+            <a:ext cx="2956255" cy="640080"/>
           </a:xfrm>
           <a:prstGeom prst="rect">
             <a:avLst/>
@@ -10205,7 +10205,7 @@
                 <a:ea typeface="Hanken Grotesk" pitchFamily="34" charset="-122"/>
                 <a:cs typeface="Hanken Grotesk" pitchFamily="34" charset="-120"/>
               </a:rPr>
-              <a:t>Laboris nisi ut aliquip ex ea commodo.</a:t>
+              <a:t>Laboris nisi ut aliquip ex ea.</a:t>
             </a:r>
             <a:endParaRPr lang="en-US" sz="1350" dirty="0"/>
           </a:p>
@@ -10219,8 +10219,8 @@
         </p:nvSpPr>
         <p:spPr>
           <a:xfrm>
-            <a:off x="6172200" y="2724912"/>
-            <a:ext cx="5394960" cy="274320"/>
+            <a:off x="6172200" y="2481072"/>
+            <a:ext cx="4967935" cy="256032"/>
           </a:xfrm>
           <a:prstGeom prst="rect">
             <a:avLst/>
@@ -10258,12 +10258,12 @@
         </p:nvSpPr>
         <p:spPr>
           <a:xfrm>
-            <a:off x="5897880" y="3264408"/>
-            <a:ext cx="5836615" cy="1335024"/>
+            <a:off x="5806440" y="3139440"/>
+            <a:ext cx="5699455" cy="1173480"/>
           </a:xfrm>
           <a:prstGeom prst="roundRect">
             <a:avLst>
-              <a:gd name="adj" fmla="val 8219"/>
+              <a:gd name="adj" fmla="val 9351"/>
             </a:avLst>
           </a:prstGeom>
           <a:solidFill>
@@ -10285,8 +10285,8 @@
         </p:nvSpPr>
         <p:spPr>
           <a:xfrm>
-            <a:off x="6172200" y="3447288"/>
-            <a:ext cx="2011680" cy="685800"/>
+            <a:off x="6172200" y="3304032"/>
+            <a:ext cx="1828800" cy="640080"/>
           </a:xfrm>
           <a:prstGeom prst="rect">
             <a:avLst/>
@@ -10302,7 +10302,7 @@
               <a:buNone/>
             </a:pPr>
             <a:r>
-              <a:rPr lang="en-US" sz="3200" b="1" dirty="0">
+              <a:rPr lang="en-US" sz="3000" b="1" dirty="0">
                 <a:solidFill>
                   <a:srgbClr val="2E4AED"/>
                 </a:solidFill>
@@ -10312,7 +10312,7 @@
               </a:rPr>
               <a:t>62%</a:t>
             </a:r>
-            <a:endParaRPr lang="en-US" sz="3200" dirty="0"/>
+            <a:endParaRPr lang="en-US" sz="3000" dirty="0"/>
           </a:p>
         </p:txBody>
       </p:sp>
@@ -10324,8 +10324,8 @@
         </p:nvSpPr>
         <p:spPr>
           <a:xfrm>
-            <a:off x="8275320" y="3465576"/>
-            <a:ext cx="3291840" cy="640080"/>
+            <a:off x="8183880" y="3304032"/>
+            <a:ext cx="2956255" cy="640080"/>
           </a:xfrm>
           <a:prstGeom prst="rect">
             <a:avLst/>
@@ -10349,7 +10349,7 @@
                 <a:ea typeface="Hanken Grotesk" pitchFamily="34" charset="-122"/>
                 <a:cs typeface="Hanken Grotesk" pitchFamily="34" charset="-120"/>
               </a:rPr>
-              <a:t>Deserunt mollit anim id est laborum curabitur.</a:t>
+              <a:t>Deserunt mollit anim id est laborum.</a:t>
             </a:r>
             <a:endParaRPr lang="en-US" sz="1350" dirty="0"/>
           </a:p>
@@ -10363,8 +10363,8 @@
         </p:nvSpPr>
         <p:spPr>
           <a:xfrm>
-            <a:off x="6172200" y="4206240"/>
-            <a:ext cx="5394960" cy="274320"/>
+            <a:off x="6172200" y="3928872"/>
+            <a:ext cx="4967935" cy="256032"/>
           </a:xfrm>
           <a:prstGeom prst="rect">
             <a:avLst/>
@@ -10402,12 +10402,12 @@
         </p:nvSpPr>
         <p:spPr>
           <a:xfrm>
-            <a:off x="5897880" y="4745736"/>
-            <a:ext cx="5836615" cy="1335024"/>
+            <a:off x="5806440" y="4587240"/>
+            <a:ext cx="5699455" cy="1173480"/>
           </a:xfrm>
           <a:prstGeom prst="roundRect">
             <a:avLst>
-              <a:gd name="adj" fmla="val 8219"/>
+              <a:gd name="adj" fmla="val 9351"/>
             </a:avLst>
           </a:prstGeom>
           <a:solidFill>
@@ -10429,8 +10429,8 @@
         </p:nvSpPr>
         <p:spPr>
           <a:xfrm>
-            <a:off x="6172200" y="4928616"/>
-            <a:ext cx="2011680" cy="685800"/>
+            <a:off x="6172200" y="4751832"/>
+            <a:ext cx="1828800" cy="640080"/>
           </a:xfrm>
           <a:prstGeom prst="rect">
             <a:avLst/>
@@ -10446,7 +10446,7 @@
               <a:buNone/>
             </a:pPr>
             <a:r>
-              <a:rPr lang="en-US" sz="3200" b="1" dirty="0">
+              <a:rPr lang="en-US" sz="3000" b="1" dirty="0">
                 <a:solidFill>
                   <a:srgbClr val="2E4AED"/>
                 </a:solidFill>
@@ -10456,7 +10456,7 @@
               </a:rPr>
               <a:t>5 steps</a:t>
             </a:r>
-            <a:endParaRPr lang="en-US" sz="3200" dirty="0"/>
+            <a:endParaRPr lang="en-US" sz="3000" dirty="0"/>
           </a:p>
         </p:txBody>
       </p:sp>
@@ -10468,8 +10468,8 @@
         </p:nvSpPr>
         <p:spPr>
           <a:xfrm>
-            <a:off x="8275320" y="4946904"/>
-            <a:ext cx="3291840" cy="640080"/>
+            <a:off x="8183880" y="4751832"/>
+            <a:ext cx="2956255" cy="640080"/>
           </a:xfrm>
           <a:prstGeom prst="rect">
             <a:avLst/>
@@ -10493,7 +10493,7 @@
                 <a:ea typeface="Hanken Grotesk" pitchFamily="34" charset="-122"/>
                 <a:cs typeface="Hanken Grotesk" pitchFamily="34" charset="-120"/>
               </a:rPr>
-              <a:t>Nibh euismod gravida lorem ipsum dolor sit.</a:t>
+              <a:t>Nibh euismod gravida lorem ipsum dolor.</a:t>
             </a:r>
             <a:endParaRPr lang="en-US" sz="1350" dirty="0"/>
           </a:p>
@@ -10507,8 +10507,8 @@
         </p:nvSpPr>
         <p:spPr>
           <a:xfrm>
-            <a:off x="6172200" y="5687568"/>
-            <a:ext cx="5394960" cy="274320"/>
+            <a:off x="6172200" y="5376672"/>
+            <a:ext cx="4967935" cy="256032"/>
           </a:xfrm>
           <a:prstGeom prst="rect">
             <a:avLst/>
@@ -10578,8 +10578,8 @@
         </p:nvSpPr>
         <p:spPr>
           <a:xfrm>
-            <a:off x="457200" y="384048"/>
-            <a:ext cx="8961120" cy="274320"/>
+            <a:off x="685800" y="502920"/>
+            <a:ext cx="8595360" cy="274320"/>
           </a:xfrm>
           <a:prstGeom prst="rect">
             <a:avLst/>
@@ -10617,8 +10617,8 @@
         </p:nvSpPr>
         <p:spPr>
           <a:xfrm>
-            <a:off x="457200" y="676656"/>
-            <a:ext cx="11274552" cy="868680"/>
+            <a:off x="685800" y="804672"/>
+            <a:ext cx="10820095" cy="566928"/>
           </a:xfrm>
           <a:prstGeom prst="rect">
             <a:avLst/>
@@ -10637,7 +10637,7 @@
               <a:buNone/>
             </a:pPr>
             <a:r>
-              <a:rPr lang="en-US" sz="3000" b="1" dirty="0">
+              <a:rPr lang="en-US" sz="2800" b="1" dirty="0">
                 <a:solidFill>
                   <a:srgbClr val="222731"/>
                 </a:solidFill>
@@ -10645,9 +10645,9 @@
                 <a:ea typeface="Bricolage Grotesque" pitchFamily="34" charset="-122"/>
                 <a:cs typeface="Bricolage Grotesque" pitchFamily="34" charset="-120"/>
               </a:rPr>
-              <a:t>Fugiat nulla pariatur excepteur sint occaecat cupidatat non proident sunt in</a:t>
-            </a:r>
-            <a:endParaRPr lang="en-US" sz="3000" dirty="0"/>
+              <a:t>Fugiat nulla pariatur excepteur sint occaecat</a:t>
+            </a:r>
+            <a:endParaRPr lang="en-US" sz="2800" dirty="0"/>
           </a:p>
         </p:txBody>
       </p:sp>
@@ -10659,7 +10659,7 @@
         </p:nvSpPr>
         <p:spPr>
           <a:xfrm>
-            <a:off x="457200" y="6400800"/>
+            <a:off x="685800" y="6400800"/>
             <a:ext cx="4389120" cy="256032"/>
           </a:xfrm>
           <a:prstGeom prst="rect">
@@ -10699,7 +10699,7 @@
         <p:spPr>
           <a:xfrm>
             <a:off x="4937760" y="6400800"/>
-            <a:ext cx="5943600" cy="256032"/>
+            <a:ext cx="5790895" cy="256032"/>
           </a:xfrm>
           <a:prstGeom prst="rect">
             <a:avLst/>
@@ -10737,7 +10737,7 @@
         </p:nvSpPr>
         <p:spPr>
           <a:xfrm>
-            <a:off x="11091672" y="6400800"/>
+            <a:off x="10865815" y="6400800"/>
             <a:ext cx="640080" cy="256032"/>
           </a:xfrm>
           <a:prstGeom prst="rect">
@@ -10776,12 +10776,12 @@
         </p:nvSpPr>
         <p:spPr>
           <a:xfrm>
-            <a:off x="457200" y="1783080"/>
-            <a:ext cx="3576218" cy="4343400"/>
+            <a:off x="685800" y="1691640"/>
+            <a:ext cx="3423818" cy="4069080"/>
           </a:xfrm>
           <a:prstGeom prst="roundRect">
             <a:avLst>
-              <a:gd name="adj" fmla="val 3068"/>
+              <a:gd name="adj" fmla="val 3205"/>
             </a:avLst>
           </a:prstGeom>
           <a:solidFill>
@@ -10803,8 +10803,8 @@
         </p:nvSpPr>
         <p:spPr>
           <a:xfrm>
-            <a:off x="731520" y="2057400"/>
-            <a:ext cx="640080" cy="640080"/>
+            <a:off x="1051560" y="2057400"/>
+            <a:ext cx="585216" cy="585216"/>
           </a:xfrm>
           <a:prstGeom prst="roundRect">
             <a:avLst>
@@ -10838,8 +10838,8 @@
         </p:blipFill>
         <p:spPr>
           <a:xfrm>
-            <a:off x="859536" y="2185416"/>
-            <a:ext cx="384048" cy="384048"/>
+            <a:off x="1168603" y="2174443"/>
+            <a:ext cx="351130" cy="351130"/>
           </a:xfrm>
           <a:prstGeom prst="rect">
             <a:avLst/>
@@ -10854,8 +10854,8 @@
         </p:nvSpPr>
         <p:spPr>
           <a:xfrm>
-            <a:off x="1508760" y="2075688"/>
-            <a:ext cx="2296058" cy="329184"/>
+            <a:off x="1801368" y="2075688"/>
+            <a:ext cx="1942490" cy="310896"/>
           </a:xfrm>
           <a:prstGeom prst="rect">
             <a:avLst/>
@@ -10893,8 +10893,8 @@
         </p:nvSpPr>
         <p:spPr>
           <a:xfrm>
-            <a:off x="1508760" y="2423160"/>
-            <a:ext cx="2296058" cy="274320"/>
+            <a:off x="1801368" y="2386584"/>
+            <a:ext cx="1942490" cy="256032"/>
           </a:xfrm>
           <a:prstGeom prst="rect">
             <a:avLst/>
@@ -10932,8 +10932,8 @@
         </p:nvSpPr>
         <p:spPr>
           <a:xfrm>
-            <a:off x="731520" y="2971800"/>
-            <a:ext cx="3027578" cy="274320"/>
+            <a:off x="1051560" y="2834640"/>
+            <a:ext cx="2692298" cy="274320"/>
           </a:xfrm>
           <a:prstGeom prst="rect">
             <a:avLst/>
@@ -10971,8 +10971,8 @@
         </p:nvSpPr>
         <p:spPr>
           <a:xfrm>
-            <a:off x="731520" y="3246120"/>
-            <a:ext cx="3027578" cy="914400"/>
+            <a:off x="1051560" y="3127248"/>
+            <a:ext cx="2692298" cy="594360"/>
           </a:xfrm>
           <a:prstGeom prst="rect">
             <a:avLst/>
@@ -11000,7 +11000,7 @@
                 <a:ea typeface="Hanken Grotesk" pitchFamily="34" charset="-122"/>
                 <a:cs typeface="Hanken Grotesk" pitchFamily="34" charset="-120"/>
               </a:rPr>
-              <a:t>Labore et dolore magna aliqua ut enim ad.</a:t>
+              <a:t>Labore et dolore magna.</a:t>
             </a:r>
             <a:endParaRPr lang="en-US" sz="1150" dirty="0"/>
           </a:p>
@@ -11021,7 +11021,7 @@
                 <a:ea typeface="Hanken Grotesk" pitchFamily="34" charset="-122"/>
                 <a:cs typeface="Hanken Grotesk" pitchFamily="34" charset="-120"/>
               </a:rPr>
-              <a:t>Deserunt mollit anim id est laborum curabitur.</a:t>
+              <a:t>Deserunt mollit anim id.</a:t>
             </a:r>
             <a:endParaRPr lang="en-US" sz="1150" dirty="0"/>
           </a:p>
@@ -11035,8 +11035,8 @@
         </p:nvSpPr>
         <p:spPr>
           <a:xfrm>
-            <a:off x="731520" y="4114800"/>
-            <a:ext cx="3027578" cy="274320"/>
+            <a:off x="1051560" y="3840480"/>
+            <a:ext cx="2692298" cy="274320"/>
           </a:xfrm>
           <a:prstGeom prst="rect">
             <a:avLst/>
@@ -11074,8 +11074,8 @@
         </p:nvSpPr>
         <p:spPr>
           <a:xfrm>
-            <a:off x="731520" y="4389120"/>
-            <a:ext cx="3027578" cy="914400"/>
+            <a:off x="1051560" y="4133088"/>
+            <a:ext cx="2692298" cy="594360"/>
           </a:xfrm>
           <a:prstGeom prst="rect">
             <a:avLst/>
@@ -11103,7 +11103,7 @@
                 <a:ea typeface="Hanken Grotesk" pitchFamily="34" charset="-122"/>
                 <a:cs typeface="Hanken Grotesk" pitchFamily="34" charset="-120"/>
               </a:rPr>
-              <a:t>Consequat duis aute irure dolor in reprehenderit in.</a:t>
+              <a:t>Consequat duis aute irure.</a:t>
             </a:r>
             <a:endParaRPr lang="en-US" sz="1150" dirty="0"/>
           </a:p>
@@ -11124,7 +11124,7 @@
                 <a:ea typeface="Hanken Grotesk" pitchFamily="34" charset="-122"/>
                 <a:cs typeface="Hanken Grotesk" pitchFamily="34" charset="-120"/>
               </a:rPr>
-              <a:t>Est eros bibendum elit nec luctus magna.</a:t>
+              <a:t>Est eros bibendum elit.</a:t>
             </a:r>
             <a:endParaRPr lang="en-US" sz="1150" dirty="0"/>
           </a:p>
@@ -11138,8 +11138,8 @@
         </p:nvSpPr>
         <p:spPr>
           <a:xfrm>
-            <a:off x="731520" y="5486400"/>
-            <a:ext cx="3027578" cy="411480"/>
+            <a:off x="1051560" y="4983480"/>
+            <a:ext cx="2692298" cy="411480"/>
           </a:xfrm>
           <a:prstGeom prst="roundRect">
             <a:avLst>
@@ -11165,8 +11165,8 @@
         </p:nvSpPr>
         <p:spPr>
           <a:xfrm>
-            <a:off x="868680" y="5486400"/>
-            <a:ext cx="2753258" cy="411480"/>
+            <a:off x="1188720" y="4983480"/>
+            <a:ext cx="2417978" cy="411480"/>
           </a:xfrm>
           <a:prstGeom prst="rect">
             <a:avLst/>
@@ -11204,12 +11204,12 @@
         </p:nvSpPr>
         <p:spPr>
           <a:xfrm>
-            <a:off x="4307738" y="1783080"/>
-            <a:ext cx="3576218" cy="4343400"/>
+            <a:off x="4383938" y="1691640"/>
+            <a:ext cx="3423818" cy="4069080"/>
           </a:xfrm>
           <a:prstGeom prst="roundRect">
             <a:avLst>
-              <a:gd name="adj" fmla="val 3068"/>
+              <a:gd name="adj" fmla="val 3205"/>
             </a:avLst>
           </a:prstGeom>
           <a:solidFill>
@@ -11231,8 +11231,8 @@
         </p:nvSpPr>
         <p:spPr>
           <a:xfrm>
-            <a:off x="4582058" y="2057400"/>
-            <a:ext cx="640080" cy="640080"/>
+            <a:off x="4749698" y="2057400"/>
+            <a:ext cx="585216" cy="585216"/>
           </a:xfrm>
           <a:prstGeom prst="roundRect">
             <a:avLst>
@@ -11266,8 +11266,8 @@
         </p:blipFill>
         <p:spPr>
           <a:xfrm>
-            <a:off x="4710074" y="2185416"/>
-            <a:ext cx="384048" cy="384048"/>
+            <a:off x="4866742" y="2174443"/>
+            <a:ext cx="351130" cy="351130"/>
           </a:xfrm>
           <a:prstGeom prst="rect">
             <a:avLst/>
@@ -11282,8 +11282,8 @@
         </p:nvSpPr>
         <p:spPr>
           <a:xfrm>
-            <a:off x="5359298" y="2075688"/>
-            <a:ext cx="2296058" cy="329184"/>
+            <a:off x="5499506" y="2075688"/>
+            <a:ext cx="1942490" cy="310896"/>
           </a:xfrm>
           <a:prstGeom prst="rect">
             <a:avLst/>
@@ -11321,8 +11321,8 @@
         </p:nvSpPr>
         <p:spPr>
           <a:xfrm>
-            <a:off x="5359298" y="2423160"/>
-            <a:ext cx="2296058" cy="274320"/>
+            <a:off x="5499506" y="2386584"/>
+            <a:ext cx="1942490" cy="256032"/>
           </a:xfrm>
           <a:prstGeom prst="rect">
             <a:avLst/>
@@ -11360,8 +11360,8 @@
         </p:nvSpPr>
         <p:spPr>
           <a:xfrm>
-            <a:off x="4582058" y="2971800"/>
-            <a:ext cx="3027578" cy="274320"/>
+            <a:off x="4749698" y="2834640"/>
+            <a:ext cx="2692298" cy="274320"/>
           </a:xfrm>
           <a:prstGeom prst="rect">
             <a:avLst/>
@@ -11399,8 +11399,8 @@
         </p:nvSpPr>
         <p:spPr>
           <a:xfrm>
-            <a:off x="4582058" y="3246120"/>
-            <a:ext cx="3027578" cy="914400"/>
+            <a:off x="4749698" y="3127248"/>
+            <a:ext cx="2692298" cy="594360"/>
           </a:xfrm>
           <a:prstGeom prst="rect">
             <a:avLst/>
@@ -11428,7 +11428,7 @@
                 <a:ea typeface="Hanken Grotesk" pitchFamily="34" charset="-122"/>
                 <a:cs typeface="Hanken Grotesk" pitchFamily="34" charset="-120"/>
               </a:rPr>
-              <a:t>Fugiat nulla pariatur excepteur sint occaecat cupidatat non.</a:t>
+              <a:t>Fugiat nulla pariatur excepteur.</a:t>
             </a:r>
             <a:endParaRPr lang="en-US" sz="1150" dirty="0"/>
           </a:p>
@@ -11449,7 +11449,7 @@
                 <a:ea typeface="Hanken Grotesk" pitchFamily="34" charset="-122"/>
                 <a:cs typeface="Hanken Grotesk" pitchFamily="34" charset="-120"/>
               </a:rPr>
-              <a:t>Nibh euismod gravida lorem ipsum dolor sit.</a:t>
+              <a:t>Nibh euismod gravida lorem.</a:t>
             </a:r>
             <a:endParaRPr lang="en-US" sz="1150" dirty="0"/>
           </a:p>
@@ -11463,8 +11463,8 @@
         </p:nvSpPr>
         <p:spPr>
           <a:xfrm>
-            <a:off x="4582058" y="4114800"/>
-            <a:ext cx="3027578" cy="274320"/>
+            <a:off x="4749698" y="3840480"/>
+            <a:ext cx="2692298" cy="274320"/>
           </a:xfrm>
           <a:prstGeom prst="rect">
             <a:avLst/>
@@ -11502,8 +11502,8 @@
         </p:nvSpPr>
         <p:spPr>
           <a:xfrm>
-            <a:off x="4582058" y="4389120"/>
-            <a:ext cx="3027578" cy="914400"/>
+            <a:off x="4749698" y="4133088"/>
+            <a:ext cx="2692298" cy="594360"/>
           </a:xfrm>
           <a:prstGeom prst="rect">
             <a:avLst/>
@@ -11531,7 +11531,7 @@
                 <a:ea typeface="Hanken Grotesk" pitchFamily="34" charset="-122"/>
                 <a:cs typeface="Hanken Grotesk" pitchFamily="34" charset="-120"/>
               </a:rPr>
-              <a:t>Pretium tincidunt lacus nulla gravida orci a odio.</a:t>
+              <a:t>Pretium tincidunt lacus nulla.</a:t>
             </a:r>
             <a:endParaRPr lang="en-US" sz="1150" dirty="0"/>
           </a:p>
@@ -11552,7 +11552,7 @@
                 <a:ea typeface="Hanken Grotesk" pitchFamily="34" charset="-122"/>
                 <a:cs typeface="Hanken Grotesk" pitchFamily="34" charset="-120"/>
               </a:rPr>
-              <a:t>Aliqua ut enim ad minim veniam quis.</a:t>
+              <a:t>Aliqua ut enim ad.</a:t>
             </a:r>
             <a:endParaRPr lang="en-US" sz="1150" dirty="0"/>
           </a:p>
@@ -11566,8 +11566,8 @@
         </p:nvSpPr>
         <p:spPr>
           <a:xfrm>
-            <a:off x="4582058" y="5486400"/>
-            <a:ext cx="3027578" cy="411480"/>
+            <a:off x="4749698" y="4983480"/>
+            <a:ext cx="2692298" cy="411480"/>
           </a:xfrm>
           <a:prstGeom prst="roundRect">
             <a:avLst>
@@ -11593,8 +11593,8 @@
         </p:nvSpPr>
         <p:spPr>
           <a:xfrm>
-            <a:off x="4719218" y="5486400"/>
-            <a:ext cx="2753258" cy="411480"/>
+            <a:off x="4886858" y="4983480"/>
+            <a:ext cx="2417978" cy="411480"/>
           </a:xfrm>
           <a:prstGeom prst="rect">
             <a:avLst/>
@@ -11632,12 +11632,12 @@
         </p:nvSpPr>
         <p:spPr>
           <a:xfrm>
-            <a:off x="8158277" y="1783080"/>
-            <a:ext cx="3576218" cy="4343400"/>
+            <a:off x="8082077" y="1691640"/>
+            <a:ext cx="3423818" cy="4069080"/>
           </a:xfrm>
           <a:prstGeom prst="roundRect">
             <a:avLst>
-              <a:gd name="adj" fmla="val 3068"/>
+              <a:gd name="adj" fmla="val 3205"/>
             </a:avLst>
           </a:prstGeom>
           <a:solidFill>
@@ -11659,8 +11659,8 @@
         </p:nvSpPr>
         <p:spPr>
           <a:xfrm>
-            <a:off x="8432597" y="2057400"/>
-            <a:ext cx="640080" cy="640080"/>
+            <a:off x="8447837" y="2057400"/>
+            <a:ext cx="585216" cy="585216"/>
           </a:xfrm>
           <a:prstGeom prst="roundRect">
             <a:avLst>
@@ -11694,8 +11694,8 @@
         </p:blipFill>
         <p:spPr>
           <a:xfrm>
-            <a:off x="8560613" y="2185416"/>
-            <a:ext cx="384048" cy="384048"/>
+            <a:off x="8564880" y="2174443"/>
+            <a:ext cx="351130" cy="351130"/>
           </a:xfrm>
           <a:prstGeom prst="rect">
             <a:avLst/>
@@ -11710,8 +11710,8 @@
         </p:nvSpPr>
         <p:spPr>
           <a:xfrm>
-            <a:off x="9209837" y="2075688"/>
-            <a:ext cx="2296058" cy="329184"/>
+            <a:off x="9197645" y="2075688"/>
+            <a:ext cx="1942490" cy="310896"/>
           </a:xfrm>
           <a:prstGeom prst="rect">
             <a:avLst/>
@@ -11749,8 +11749,8 @@
         </p:nvSpPr>
         <p:spPr>
           <a:xfrm>
-            <a:off x="9209837" y="2423160"/>
-            <a:ext cx="2296058" cy="274320"/>
+            <a:off x="9197645" y="2386584"/>
+            <a:ext cx="1942490" cy="256032"/>
           </a:xfrm>
           <a:prstGeom prst="rect">
             <a:avLst/>
@@ -11788,8 +11788,8 @@
         </p:nvSpPr>
         <p:spPr>
           <a:xfrm>
-            <a:off x="8432597" y="2971800"/>
-            <a:ext cx="3027578" cy="274320"/>
+            <a:off x="8447837" y="2834640"/>
+            <a:ext cx="2692298" cy="274320"/>
           </a:xfrm>
           <a:prstGeom prst="rect">
             <a:avLst/>
@@ -11827,8 +11827,8 @@
         </p:nvSpPr>
         <p:spPr>
           <a:xfrm>
-            <a:off x="8432597" y="3246120"/>
-            <a:ext cx="3027578" cy="914400"/>
+            <a:off x="8447837" y="3127248"/>
+            <a:ext cx="2692298" cy="594360"/>
           </a:xfrm>
           <a:prstGeom prst="rect">
             <a:avLst/>
@@ -11856,7 +11856,7 @@
                 <a:ea typeface="Hanken Grotesk" pitchFamily="34" charset="-122"/>
                 <a:cs typeface="Hanken Grotesk" pitchFamily="34" charset="-120"/>
               </a:rPr>
-              <a:t>Est eros bibendum elit nec luctus magna felis.</a:t>
+              <a:t>Est eros bibendum elit.</a:t>
             </a:r>
             <a:endParaRPr lang="en-US" sz="1150" dirty="0"/>
           </a:p>
@@ -11877,7 +11877,7 @@
                 <a:ea typeface="Hanken Grotesk" pitchFamily="34" charset="-122"/>
                 <a:cs typeface="Hanken Grotesk" pitchFamily="34" charset="-120"/>
               </a:rPr>
-              <a:t>Ex ea commodo consequat duis aute irure.</a:t>
+              <a:t>Ex ea commodo consequat.</a:t>
             </a:r>
             <a:endParaRPr lang="en-US" sz="1150" dirty="0"/>
           </a:p>
@@ -11891,8 +11891,8 @@
         </p:nvSpPr>
         <p:spPr>
           <a:xfrm>
-            <a:off x="8432597" y="4114800"/>
-            <a:ext cx="3027578" cy="274320"/>
+            <a:off x="8447837" y="3840480"/>
+            <a:ext cx="2692298" cy="274320"/>
           </a:xfrm>
           <a:prstGeom prst="rect">
             <a:avLst/>
@@ -11930,8 +11930,8 @@
         </p:nvSpPr>
         <p:spPr>
           <a:xfrm>
-            <a:off x="8432597" y="4389120"/>
-            <a:ext cx="3027578" cy="914400"/>
+            <a:off x="8447837" y="4133088"/>
+            <a:ext cx="2692298" cy="594360"/>
           </a:xfrm>
           <a:prstGeom prst="rect">
             <a:avLst/>
@@ -11959,7 +11959,7 @@
                 <a:ea typeface="Hanken Grotesk" pitchFamily="34" charset="-122"/>
                 <a:cs typeface="Hanken Grotesk" pitchFamily="34" charset="-120"/>
               </a:rPr>
-              <a:t>Amet consectetur adipiscing elit sed do eiusmod tempor.</a:t>
+              <a:t>Amet consectetur adipiscing elit.</a:t>
             </a:r>
             <a:endParaRPr lang="en-US" sz="1150" dirty="0"/>
           </a:p>
@@ -11980,7 +11980,7 @@
                 <a:ea typeface="Hanken Grotesk" pitchFamily="34" charset="-122"/>
                 <a:cs typeface="Hanken Grotesk" pitchFamily="34" charset="-120"/>
               </a:rPr>
-              <a:t>Sint occaecat cupidatat non proident sunt in.</a:t>
+              <a:t>Sint occaecat cupidatat non.</a:t>
             </a:r>
             <a:endParaRPr lang="en-US" sz="1150" dirty="0"/>
           </a:p>
@@ -11994,8 +11994,8 @@
         </p:nvSpPr>
         <p:spPr>
           <a:xfrm>
-            <a:off x="8432597" y="5486400"/>
-            <a:ext cx="3027578" cy="411480"/>
+            <a:off x="8447837" y="4983480"/>
+            <a:ext cx="2692298" cy="411480"/>
           </a:xfrm>
           <a:prstGeom prst="roundRect">
             <a:avLst>
@@ -12021,8 +12021,8 @@
         </p:nvSpPr>
         <p:spPr>
           <a:xfrm>
-            <a:off x="8569757" y="5486400"/>
-            <a:ext cx="2753258" cy="411480"/>
+            <a:off x="8584997" y="4983480"/>
+            <a:ext cx="2417978" cy="411480"/>
           </a:xfrm>
           <a:prstGeom prst="rect">
             <a:avLst/>
@@ -12092,8 +12092,8 @@
         </p:nvSpPr>
         <p:spPr>
           <a:xfrm>
-            <a:off x="457200" y="384048"/>
-            <a:ext cx="8961120" cy="274320"/>
+            <a:off x="685800" y="502920"/>
+            <a:ext cx="8595360" cy="274320"/>
           </a:xfrm>
           <a:prstGeom prst="rect">
             <a:avLst/>
@@ -12131,8 +12131,8 @@
         </p:nvSpPr>
         <p:spPr>
           <a:xfrm>
-            <a:off x="457200" y="676656"/>
-            <a:ext cx="11274552" cy="868680"/>
+            <a:off x="685800" y="804672"/>
+            <a:ext cx="10820095" cy="566928"/>
           </a:xfrm>
           <a:prstGeom prst="rect">
             <a:avLst/>
@@ -12151,7 +12151,7 @@
               <a:buNone/>
             </a:pPr>
             <a:r>
-              <a:rPr lang="en-US" sz="3000" b="1" dirty="0">
+              <a:rPr lang="en-US" sz="2800" b="1" dirty="0">
                 <a:solidFill>
                   <a:srgbClr val="222731"/>
                 </a:solidFill>
@@ -12159,9 +12159,9 @@
                 <a:ea typeface="Bricolage Grotesque" pitchFamily="34" charset="-122"/>
                 <a:cs typeface="Bricolage Grotesque" pitchFamily="34" charset="-120"/>
               </a:rPr>
-              <a:t>Pretium tincidunt lacus nulla gravida orci a odio nullam</a:t>
-            </a:r>
-            <a:endParaRPr lang="en-US" sz="3000" dirty="0"/>
+              <a:t>Pretium tincidunt lacus nulla gravida orci a</a:t>
+            </a:r>
+            <a:endParaRPr lang="en-US" sz="2800" dirty="0"/>
           </a:p>
         </p:txBody>
       </p:sp>
@@ -12173,7 +12173,7 @@
         </p:nvSpPr>
         <p:spPr>
           <a:xfrm>
-            <a:off x="457200" y="6400800"/>
+            <a:off x="685800" y="6400800"/>
             <a:ext cx="4389120" cy="256032"/>
           </a:xfrm>
           <a:prstGeom prst="rect">
@@ -12213,7 +12213,7 @@
         <p:spPr>
           <a:xfrm>
             <a:off x="4937760" y="6400800"/>
-            <a:ext cx="5943600" cy="256032"/>
+            <a:ext cx="5790895" cy="256032"/>
           </a:xfrm>
           <a:prstGeom prst="rect">
             <a:avLst/>
@@ -12251,7 +12251,7 @@
         </p:nvSpPr>
         <p:spPr>
           <a:xfrm>
-            <a:off x="11091672" y="6400800"/>
+            <a:off x="10865815" y="6400800"/>
             <a:ext cx="640080" cy="256032"/>
           </a:xfrm>
           <a:prstGeom prst="rect">
@@ -12290,12 +12290,12 @@
         </p:nvSpPr>
         <p:spPr>
           <a:xfrm>
-            <a:off x="457200" y="1783080"/>
-            <a:ext cx="3576218" cy="4343400"/>
+            <a:off x="685800" y="1691640"/>
+            <a:ext cx="3423818" cy="4069080"/>
           </a:xfrm>
           <a:prstGeom prst="roundRect">
             <a:avLst>
-              <a:gd name="adj" fmla="val 3068"/>
+              <a:gd name="adj" fmla="val 3205"/>
             </a:avLst>
           </a:prstGeom>
           <a:solidFill>
@@ -12317,7 +12317,7 @@
         </p:nvSpPr>
         <p:spPr>
           <a:xfrm>
-            <a:off x="731520" y="2011680"/>
+            <a:off x="1051560" y="2057400"/>
             <a:ext cx="457200" cy="457200"/>
           </a:xfrm>
           <a:prstGeom prst="roundRect">
@@ -12352,7 +12352,7 @@
         </p:blipFill>
         <p:spPr>
           <a:xfrm>
-            <a:off x="822960" y="2103120"/>
+            <a:off x="1143000" y="2148840"/>
             <a:ext cx="274320" cy="274320"/>
           </a:xfrm>
           <a:prstGeom prst="rect">
@@ -12368,8 +12368,8 @@
         </p:nvSpPr>
         <p:spPr>
           <a:xfrm>
-            <a:off x="731520" y="2606040"/>
-            <a:ext cx="3027578" cy="1828800"/>
+            <a:off x="1051560" y="2697480"/>
+            <a:ext cx="2692298" cy="1371600"/>
           </a:xfrm>
           <a:prstGeom prst="rect">
             <a:avLst/>
@@ -12393,7 +12393,7 @@
                 <a:ea typeface="Bricolage Grotesque" pitchFamily="34" charset="-122"/>
                 <a:cs typeface="Bricolage Grotesque" pitchFamily="34" charset="-120"/>
               </a:rPr>
-              <a:t>“Labore et dolore magna aliqua ut enim ad minim veniam quis nostrud exercitation ullamco laboris nisi ut aliquip ex ea.”</a:t>
+              <a:t>“Labore et dolore magna aliqua ut enim ad minim veniam quis nostrud exercitation ullamco laboris.”</a:t>
             </a:r>
             <a:endParaRPr lang="en-US" sz="1600" dirty="0"/>
           </a:p>
@@ -12407,8 +12407,8 @@
         </p:nvSpPr>
         <p:spPr>
           <a:xfrm>
-            <a:off x="731520" y="4572000"/>
-            <a:ext cx="3027578" cy="0"/>
+            <a:off x="1051560" y="4206240"/>
+            <a:ext cx="2692298" cy="0"/>
           </a:xfrm>
           <a:prstGeom prst="line">
             <a:avLst/>
@@ -12430,8 +12430,8 @@
         </p:nvSpPr>
         <p:spPr>
           <a:xfrm>
-            <a:off x="731520" y="4709160"/>
-            <a:ext cx="3027578" cy="292608"/>
+            <a:off x="1051560" y="4343400"/>
+            <a:ext cx="2692298" cy="292608"/>
           </a:xfrm>
           <a:prstGeom prst="rect">
             <a:avLst/>
@@ -12469,8 +12469,8 @@
         </p:nvSpPr>
         <p:spPr>
           <a:xfrm>
-            <a:off x="731520" y="5029200"/>
-            <a:ext cx="3027578" cy="274320"/>
+            <a:off x="1051560" y="4654296"/>
+            <a:ext cx="2692298" cy="256032"/>
           </a:xfrm>
           <a:prstGeom prst="rect">
             <a:avLst/>
@@ -12508,8 +12508,8 @@
         </p:nvSpPr>
         <p:spPr>
           <a:xfrm>
-            <a:off x="731520" y="5440680"/>
-            <a:ext cx="3027578" cy="411480"/>
+            <a:off x="1051560" y="4983480"/>
+            <a:ext cx="2692298" cy="411480"/>
           </a:xfrm>
           <a:prstGeom prst="roundRect">
             <a:avLst>
@@ -12535,8 +12535,8 @@
         </p:nvSpPr>
         <p:spPr>
           <a:xfrm>
-            <a:off x="868680" y="5440680"/>
-            <a:ext cx="2753258" cy="411480"/>
+            <a:off x="1188720" y="4983480"/>
+            <a:ext cx="2417978" cy="411480"/>
           </a:xfrm>
           <a:prstGeom prst="rect">
             <a:avLst/>
@@ -12574,12 +12574,12 @@
         </p:nvSpPr>
         <p:spPr>
           <a:xfrm>
-            <a:off x="4307738" y="1783080"/>
-            <a:ext cx="3576218" cy="4343400"/>
+            <a:off x="4383938" y="1691640"/>
+            <a:ext cx="3423818" cy="4069080"/>
           </a:xfrm>
           <a:prstGeom prst="roundRect">
             <a:avLst>
-              <a:gd name="adj" fmla="val 3068"/>
+              <a:gd name="adj" fmla="val 3205"/>
             </a:avLst>
           </a:prstGeom>
           <a:solidFill>
@@ -12601,7 +12601,7 @@
         </p:nvSpPr>
         <p:spPr>
           <a:xfrm>
-            <a:off x="4582058" y="2011680"/>
+            <a:off x="4749698" y="2057400"/>
             <a:ext cx="457200" cy="457200"/>
           </a:xfrm>
           <a:prstGeom prst="roundRect">
@@ -12636,7 +12636,7 @@
         </p:blipFill>
         <p:spPr>
           <a:xfrm>
-            <a:off x="4673498" y="2103120"/>
+            <a:off x="4841138" y="2148840"/>
             <a:ext cx="274320" cy="274320"/>
           </a:xfrm>
           <a:prstGeom prst="rect">
@@ -12652,8 +12652,8 @@
         </p:nvSpPr>
         <p:spPr>
           <a:xfrm>
-            <a:off x="4582058" y="2606040"/>
-            <a:ext cx="3027578" cy="1828800"/>
+            <a:off x="4749698" y="2697480"/>
+            <a:ext cx="2692298" cy="1371600"/>
           </a:xfrm>
           <a:prstGeom prst="rect">
             <a:avLst/>
@@ -12677,7 +12677,7 @@
                 <a:ea typeface="Bricolage Grotesque" pitchFamily="34" charset="-122"/>
                 <a:cs typeface="Bricolage Grotesque" pitchFamily="34" charset="-120"/>
               </a:rPr>
-              <a:t>“Non proident sunt in culpa qui officia deserunt mollit anim id est laborum curabitur pretium tincidunt lacus nulla gravida orci.”</a:t>
+              <a:t>“Non proident sunt in culpa qui officia deserunt mollit anim id est laborum curabitur pretium.”</a:t>
             </a:r>
             <a:endParaRPr lang="en-US" sz="1600" dirty="0"/>
           </a:p>
@@ -12691,8 +12691,8 @@
         </p:nvSpPr>
         <p:spPr>
           <a:xfrm>
-            <a:off x="4582058" y="4572000"/>
-            <a:ext cx="3027578" cy="0"/>
+            <a:off x="4749698" y="4206240"/>
+            <a:ext cx="2692298" cy="0"/>
           </a:xfrm>
           <a:prstGeom prst="line">
             <a:avLst/>
@@ -12714,8 +12714,8 @@
         </p:nvSpPr>
         <p:spPr>
           <a:xfrm>
-            <a:off x="4582058" y="4709160"/>
-            <a:ext cx="3027578" cy="292608"/>
+            <a:off x="4749698" y="4343400"/>
+            <a:ext cx="2692298" cy="292608"/>
           </a:xfrm>
           <a:prstGeom prst="rect">
             <a:avLst/>
@@ -12753,8 +12753,8 @@
         </p:nvSpPr>
         <p:spPr>
           <a:xfrm>
-            <a:off x="4582058" y="5029200"/>
-            <a:ext cx="3027578" cy="274320"/>
+            <a:off x="4749698" y="4654296"/>
+            <a:ext cx="2692298" cy="256032"/>
           </a:xfrm>
           <a:prstGeom prst="rect">
             <a:avLst/>
@@ -12792,8 +12792,8 @@
         </p:nvSpPr>
         <p:spPr>
           <a:xfrm>
-            <a:off x="4582058" y="5440680"/>
-            <a:ext cx="3027578" cy="411480"/>
+            <a:off x="4749698" y="4983480"/>
+            <a:ext cx="2692298" cy="411480"/>
           </a:xfrm>
           <a:prstGeom prst="roundRect">
             <a:avLst>
@@ -12819,8 +12819,8 @@
         </p:nvSpPr>
         <p:spPr>
           <a:xfrm>
-            <a:off x="4719218" y="5440680"/>
-            <a:ext cx="2753258" cy="411480"/>
+            <a:off x="4886858" y="4983480"/>
+            <a:ext cx="2417978" cy="411480"/>
           </a:xfrm>
           <a:prstGeom prst="rect">
             <a:avLst/>
@@ -12858,12 +12858,12 @@
         </p:nvSpPr>
         <p:spPr>
           <a:xfrm>
-            <a:off x="8158277" y="1783080"/>
-            <a:ext cx="3576218" cy="4343400"/>
+            <a:off x="8082077" y="1691640"/>
+            <a:ext cx="3423818" cy="4069080"/>
           </a:xfrm>
           <a:prstGeom prst="roundRect">
             <a:avLst>
-              <a:gd name="adj" fmla="val 3068"/>
+              <a:gd name="adj" fmla="val 3205"/>
             </a:avLst>
           </a:prstGeom>
           <a:solidFill>
@@ -12885,7 +12885,7 @@
         </p:nvSpPr>
         <p:spPr>
           <a:xfrm>
-            <a:off x="8432597" y="2011680"/>
+            <a:off x="8447837" y="2057400"/>
             <a:ext cx="457200" cy="457200"/>
           </a:xfrm>
           <a:prstGeom prst="roundRect">
@@ -12920,7 +12920,7 @@
         </p:blipFill>
         <p:spPr>
           <a:xfrm>
-            <a:off x="8524037" y="2103120"/>
+            <a:off x="8539277" y="2148840"/>
             <a:ext cx="274320" cy="274320"/>
           </a:xfrm>
           <a:prstGeom prst="rect">
@@ -12936,8 +12936,8 @@
         </p:nvSpPr>
         <p:spPr>
           <a:xfrm>
-            <a:off x="8432597" y="2606040"/>
-            <a:ext cx="3027578" cy="1828800"/>
+            <a:off x="8447837" y="2697480"/>
+            <a:ext cx="2692298" cy="1371600"/>
           </a:xfrm>
           <a:prstGeom prst="rect">
             <a:avLst/>
@@ -12961,7 +12961,7 @@
                 <a:ea typeface="Bricolage Grotesque" pitchFamily="34" charset="-122"/>
                 <a:cs typeface="Bricolage Grotesque" pitchFamily="34" charset="-120"/>
               </a:rPr>
-              <a:t>“Nibh euismod gravida lorem ipsum dolor sit amet consectetur adipiscing elit sed do eiusmod tempor incididunt ut labore et dolore.”</a:t>
+              <a:t>“Nibh euismod gravida lorem ipsum dolor sit amet consectetur adipiscing elit sed do eiusmod tempor.”</a:t>
             </a:r>
             <a:endParaRPr lang="en-US" sz="1600" dirty="0"/>
           </a:p>
@@ -12975,8 +12975,8 @@
         </p:nvSpPr>
         <p:spPr>
           <a:xfrm>
-            <a:off x="8432597" y="4572000"/>
-            <a:ext cx="3027578" cy="0"/>
+            <a:off x="8447837" y="4206240"/>
+            <a:ext cx="2692298" cy="0"/>
           </a:xfrm>
           <a:prstGeom prst="line">
             <a:avLst/>
@@ -12998,8 +12998,8 @@
         </p:nvSpPr>
         <p:spPr>
           <a:xfrm>
-            <a:off x="8432597" y="4709160"/>
-            <a:ext cx="3027578" cy="292608"/>
+            <a:off x="8447837" y="4343400"/>
+            <a:ext cx="2692298" cy="292608"/>
           </a:xfrm>
           <a:prstGeom prst="rect">
             <a:avLst/>
@@ -13037,8 +13037,8 @@
         </p:nvSpPr>
         <p:spPr>
           <a:xfrm>
-            <a:off x="8432597" y="5029200"/>
-            <a:ext cx="3027578" cy="274320"/>
+            <a:off x="8447837" y="4654296"/>
+            <a:ext cx="2692298" cy="256032"/>
           </a:xfrm>
           <a:prstGeom prst="rect">
             <a:avLst/>
@@ -13076,8 +13076,8 @@
         </p:nvSpPr>
         <p:spPr>
           <a:xfrm>
-            <a:off x="8432597" y="5440680"/>
-            <a:ext cx="3027578" cy="411480"/>
+            <a:off x="8447837" y="4983480"/>
+            <a:ext cx="2692298" cy="411480"/>
           </a:xfrm>
           <a:prstGeom prst="roundRect">
             <a:avLst>
@@ -13103,8 +13103,8 @@
         </p:nvSpPr>
         <p:spPr>
           <a:xfrm>
-            <a:off x="8569757" y="5440680"/>
-            <a:ext cx="2753258" cy="411480"/>
+            <a:off x="8584997" y="4983480"/>
+            <a:ext cx="2417978" cy="411480"/>
           </a:xfrm>
           <a:prstGeom prst="rect">
             <a:avLst/>
@@ -13174,8 +13174,8 @@
         </p:nvSpPr>
         <p:spPr>
           <a:xfrm>
-            <a:off x="457200" y="384048"/>
-            <a:ext cx="8961120" cy="274320"/>
+            <a:off x="685800" y="502920"/>
+            <a:ext cx="8595360" cy="274320"/>
           </a:xfrm>
           <a:prstGeom prst="rect">
             <a:avLst/>
@@ -13213,8 +13213,8 @@
         </p:nvSpPr>
         <p:spPr>
           <a:xfrm>
-            <a:off x="457200" y="676656"/>
-            <a:ext cx="11274552" cy="868680"/>
+            <a:off x="685800" y="804672"/>
+            <a:ext cx="10820095" cy="566928"/>
           </a:xfrm>
           <a:prstGeom prst="rect">
             <a:avLst/>
@@ -13233,7 +13233,7 @@
               <a:buNone/>
             </a:pPr>
             <a:r>
-              <a:rPr lang="en-US" sz="3000" b="1" dirty="0">
+              <a:rPr lang="en-US" sz="2800" b="1" dirty="0">
                 <a:solidFill>
                   <a:srgbClr val="222731"/>
                 </a:solidFill>
@@ -13241,9 +13241,9 @@
                 <a:ea typeface="Bricolage Grotesque" pitchFamily="34" charset="-122"/>
                 <a:cs typeface="Bricolage Grotesque" pitchFamily="34" charset="-120"/>
               </a:rPr>
-              <a:t>Felis sollicitudin mauris integer in mauris eu nibh euismod gravida</a:t>
-            </a:r>
-            <a:endParaRPr lang="en-US" sz="3000" dirty="0"/>
+              <a:t>Felis sollicitudin mauris integer in mauris</a:t>
+            </a:r>
+            <a:endParaRPr lang="en-US" sz="2800" dirty="0"/>
           </a:p>
         </p:txBody>
       </p:sp>
@@ -13255,7 +13255,7 @@
         </p:nvSpPr>
         <p:spPr>
           <a:xfrm>
-            <a:off x="457200" y="6400800"/>
+            <a:off x="685800" y="6400800"/>
             <a:ext cx="4389120" cy="256032"/>
           </a:xfrm>
           <a:prstGeom prst="rect">
@@ -13295,7 +13295,7 @@
         <p:spPr>
           <a:xfrm>
             <a:off x="4937760" y="6400800"/>
-            <a:ext cx="5943600" cy="256032"/>
+            <a:ext cx="5790895" cy="256032"/>
           </a:xfrm>
           <a:prstGeom prst="rect">
             <a:avLst/>
@@ -13333,7 +13333,7 @@
         </p:nvSpPr>
         <p:spPr>
           <a:xfrm>
-            <a:off x="11091672" y="6400800"/>
+            <a:off x="10865815" y="6400800"/>
             <a:ext cx="640080" cy="256032"/>
           </a:xfrm>
           <a:prstGeom prst="rect">
@@ -13372,7 +13372,7 @@
         </p:nvSpPr>
         <p:spPr>
           <a:xfrm>
-            <a:off x="9539935" y="384048"/>
+            <a:off x="9311335" y="475488"/>
             <a:ext cx="2194560" cy="329184"/>
           </a:xfrm>
           <a:prstGeom prst="roundRect">
@@ -13399,7 +13399,7 @@
         </p:nvSpPr>
         <p:spPr>
           <a:xfrm>
-            <a:off x="9539935" y="384048"/>
+            <a:off x="9311335" y="475488"/>
             <a:ext cx="2194560" cy="329184"/>
           </a:xfrm>
           <a:prstGeom prst="rect">
@@ -13438,12 +13438,12 @@
         </p:nvSpPr>
         <p:spPr>
           <a:xfrm>
-            <a:off x="1301198" y="1790313"/>
-            <a:ext cx="2041579" cy="4328482"/>
+            <a:off x="1426997" y="1780346"/>
+            <a:ext cx="1835359" cy="3891261"/>
           </a:xfrm>
           <a:prstGeom prst="roundRect">
             <a:avLst>
-              <a:gd name="adj" fmla="val 13437"/>
+              <a:gd name="adj" fmla="val 14000"/>
             </a:avLst>
           </a:prstGeom>
           <a:solidFill>
@@ -13465,8 +13465,8 @@
         </p:nvSpPr>
         <p:spPr>
           <a:xfrm>
-            <a:off x="1392638" y="3680234"/>
-            <a:ext cx="1858699" cy="548640"/>
+            <a:off x="1518437" y="3451657"/>
+            <a:ext cx="1652479" cy="548640"/>
           </a:xfrm>
           <a:prstGeom prst="rect">
             <a:avLst/>
@@ -13529,8 +13529,8 @@
         </p:blipFill>
         <p:spPr>
           <a:xfrm>
-            <a:off x="1188720" y="1691640"/>
-            <a:ext cx="2263140" cy="4526280"/>
+            <a:off x="1325880" y="1691640"/>
+            <a:ext cx="2034540" cy="4069080"/>
           </a:xfrm>
           <a:prstGeom prst="rect">
             <a:avLst/>
@@ -13545,7 +13545,7 @@
         </p:nvSpPr>
         <p:spPr>
           <a:xfrm>
-            <a:off x="4549140" y="2011680"/>
+            <a:off x="4366260" y="2057400"/>
             <a:ext cx="329184" cy="329184"/>
           </a:xfrm>
           <a:prstGeom prst="ellipse">
@@ -13570,7 +13570,7 @@
         </p:nvSpPr>
         <p:spPr>
           <a:xfrm>
-            <a:off x="4549140" y="2011680"/>
+            <a:off x="4366260" y="2057400"/>
             <a:ext cx="329184" cy="329184"/>
           </a:xfrm>
           <a:prstGeom prst="rect">
@@ -13609,8 +13609,8 @@
         </p:nvSpPr>
         <p:spPr>
           <a:xfrm>
-            <a:off x="5024628" y="1993392"/>
-            <a:ext cx="6709867" cy="292608"/>
+            <a:off x="4878324" y="2039112"/>
+            <a:ext cx="6627571" cy="292608"/>
           </a:xfrm>
           <a:prstGeom prst="rect">
             <a:avLst/>
@@ -13648,8 +13648,8 @@
         </p:nvSpPr>
         <p:spPr>
           <a:xfrm>
-            <a:off x="5024628" y="2322576"/>
-            <a:ext cx="6709867" cy="685800"/>
+            <a:off x="4878324" y="2386584"/>
+            <a:ext cx="6627571" cy="640080"/>
           </a:xfrm>
           <a:prstGeom prst="rect">
             <a:avLst/>
@@ -13673,7 +13673,7 @@
                 <a:ea typeface="Hanken Grotesk" pitchFamily="34" charset="-122"/>
                 <a:cs typeface="Hanken Grotesk" pitchFamily="34" charset="-120"/>
               </a:rPr>
-              <a:t>Consequat duis aute irure dolor in reprehenderit in voluptate velit esse cillum dolore eu fugiat nulla.</a:t>
+              <a:t>Consequat duis aute irure dolor in reprehenderit in voluptate velit esse cillum.</a:t>
             </a:r>
             <a:endParaRPr lang="en-US" sz="1350" dirty="0"/>
           </a:p>
@@ -13687,7 +13687,7 @@
         </p:nvSpPr>
         <p:spPr>
           <a:xfrm>
-            <a:off x="4549140" y="3383280"/>
+            <a:off x="4366260" y="3337560"/>
             <a:ext cx="329184" cy="329184"/>
           </a:xfrm>
           <a:prstGeom prst="ellipse">
@@ -13712,7 +13712,7 @@
         </p:nvSpPr>
         <p:spPr>
           <a:xfrm>
-            <a:off x="4549140" y="3383280"/>
+            <a:off x="4366260" y="3337560"/>
             <a:ext cx="329184" cy="329184"/>
           </a:xfrm>
           <a:prstGeom prst="rect">
@@ -13751,8 +13751,8 @@
         </p:nvSpPr>
         <p:spPr>
           <a:xfrm>
-            <a:off x="5024628" y="3364992"/>
-            <a:ext cx="6709867" cy="292608"/>
+            <a:off x="4878324" y="3319272"/>
+            <a:ext cx="6627571" cy="292608"/>
           </a:xfrm>
           <a:prstGeom prst="rect">
             <a:avLst/>
@@ -13790,8 +13790,8 @@
         </p:nvSpPr>
         <p:spPr>
           <a:xfrm>
-            <a:off x="5024628" y="3694176"/>
-            <a:ext cx="6709867" cy="685800"/>
+            <a:off x="4878324" y="3666744"/>
+            <a:ext cx="6627571" cy="640080"/>
           </a:xfrm>
           <a:prstGeom prst="rect">
             <a:avLst/>
@@ -13815,7 +13815,7 @@
                 <a:ea typeface="Hanken Grotesk" pitchFamily="34" charset="-122"/>
                 <a:cs typeface="Hanken Grotesk" pitchFamily="34" charset="-120"/>
               </a:rPr>
-              <a:t>Odio nullam varius turpis et commodo pharetra est eros bibendum elit nec luctus magna felis sollicitudin.</a:t>
+              <a:t>Odio nullam varius turpis et commodo pharetra est eros bibendum elit nec.</a:t>
             </a:r>
             <a:endParaRPr lang="en-US" sz="1350" dirty="0"/>
           </a:p>
@@ -13829,7 +13829,7 @@
         </p:nvSpPr>
         <p:spPr>
           <a:xfrm>
-            <a:off x="4549140" y="4754880"/>
+            <a:off x="4366260" y="4617720"/>
             <a:ext cx="329184" cy="329184"/>
           </a:xfrm>
           <a:prstGeom prst="ellipse">
@@ -13854,7 +13854,7 @@
         </p:nvSpPr>
         <p:spPr>
           <a:xfrm>
-            <a:off x="4549140" y="4754880"/>
+            <a:off x="4366260" y="4617720"/>
             <a:ext cx="329184" cy="329184"/>
           </a:xfrm>
           <a:prstGeom prst="rect">
@@ -13893,8 +13893,8 @@
         </p:nvSpPr>
         <p:spPr>
           <a:xfrm>
-            <a:off x="5024628" y="4736592"/>
-            <a:ext cx="6709867" cy="292608"/>
+            <a:off x="4878324" y="4599432"/>
+            <a:ext cx="6627571" cy="292608"/>
           </a:xfrm>
           <a:prstGeom prst="rect">
             <a:avLst/>
@@ -13932,8 +13932,8 @@
         </p:nvSpPr>
         <p:spPr>
           <a:xfrm>
-            <a:off x="5024628" y="5065776"/>
-            <a:ext cx="6709867" cy="685800"/>
+            <a:off x="4878324" y="4946904"/>
+            <a:ext cx="6627571" cy="640080"/>
           </a:xfrm>
           <a:prstGeom prst="rect">
             <a:avLst/>
@@ -13957,7 +13957,7 @@
                 <a:ea typeface="Hanken Grotesk" pitchFamily="34" charset="-122"/>
                 <a:cs typeface="Hanken Grotesk" pitchFamily="34" charset="-120"/>
               </a:rPr>
-              <a:t>Aliqua ut enim ad minim veniam quis nostrud exercitation ullamco laboris nisi ut aliquip ex ea.</a:t>
+              <a:t>Aliqua ut enim ad minim veniam quis nostrud exercitation ullamco laboris nisi.</a:t>
             </a:r>
             <a:endParaRPr lang="en-US" sz="1350" dirty="0"/>
           </a:p>
@@ -14003,8 +14003,8 @@
         </p:nvSpPr>
         <p:spPr>
           <a:xfrm>
-            <a:off x="457200" y="384048"/>
-            <a:ext cx="8961120" cy="274320"/>
+            <a:off x="685800" y="502920"/>
+            <a:ext cx="8595360" cy="274320"/>
           </a:xfrm>
           <a:prstGeom prst="rect">
             <a:avLst/>
@@ -14042,8 +14042,8 @@
         </p:nvSpPr>
         <p:spPr>
           <a:xfrm>
-            <a:off x="457200" y="676656"/>
-            <a:ext cx="11274552" cy="868680"/>
+            <a:off x="685800" y="804672"/>
+            <a:ext cx="10820095" cy="566928"/>
           </a:xfrm>
           <a:prstGeom prst="rect">
             <a:avLst/>
@@ -14062,7 +14062,7 @@
               <a:buNone/>
             </a:pPr>
             <a:r>
-              <a:rPr lang="en-US" sz="3000" b="1" dirty="0">
+              <a:rPr lang="en-US" sz="2800" b="1" dirty="0">
                 <a:solidFill>
                   <a:srgbClr val="222731"/>
                 </a:solidFill>
@@ -14070,9 +14070,9 @@
                 <a:ea typeface="Bricolage Grotesque" pitchFamily="34" charset="-122"/>
                 <a:cs typeface="Bricolage Grotesque" pitchFamily="34" charset="-120"/>
               </a:rPr>
-              <a:t>Tempor incididunt ut labore et dolore magna aliqua ut enim ad</a:t>
-            </a:r>
-            <a:endParaRPr lang="en-US" sz="3000" dirty="0"/>
+              <a:t>Tempor incididunt ut labore et dolore magna</a:t>
+            </a:r>
+            <a:endParaRPr lang="en-US" sz="2800" dirty="0"/>
           </a:p>
         </p:txBody>
       </p:sp>
@@ -14084,7 +14084,7 @@
         </p:nvSpPr>
         <p:spPr>
           <a:xfrm>
-            <a:off x="457200" y="6400800"/>
+            <a:off x="685800" y="6400800"/>
             <a:ext cx="4389120" cy="256032"/>
           </a:xfrm>
           <a:prstGeom prst="rect">
@@ -14124,7 +14124,7 @@
         <p:spPr>
           <a:xfrm>
             <a:off x="4937760" y="6400800"/>
-            <a:ext cx="5943600" cy="256032"/>
+            <a:ext cx="5790895" cy="256032"/>
           </a:xfrm>
           <a:prstGeom prst="rect">
             <a:avLst/>
@@ -14162,7 +14162,7 @@
         </p:nvSpPr>
         <p:spPr>
           <a:xfrm>
-            <a:off x="11091672" y="6400800"/>
+            <a:off x="10865815" y="6400800"/>
             <a:ext cx="640080" cy="256032"/>
           </a:xfrm>
           <a:prstGeom prst="rect">
@@ -14201,12 +14201,12 @@
         </p:nvSpPr>
         <p:spPr>
           <a:xfrm>
-            <a:off x="1965960" y="1645920"/>
-            <a:ext cx="1865925" cy="548640"/>
+            <a:off x="2148840" y="1691640"/>
+            <a:ext cx="1725107" cy="640080"/>
           </a:xfrm>
           <a:prstGeom prst="roundRect">
             <a:avLst>
-              <a:gd name="adj" fmla="val 13333"/>
+              <a:gd name="adj" fmla="val 11429"/>
             </a:avLst>
           </a:prstGeom>
           <a:solidFill>
@@ -14228,8 +14228,8 @@
         </p:nvSpPr>
         <p:spPr>
           <a:xfrm>
-            <a:off x="2093976" y="1645920"/>
-            <a:ext cx="1683045" cy="548640"/>
+            <a:off x="2295144" y="1691640"/>
+            <a:ext cx="1505651" cy="640080"/>
           </a:xfrm>
           <a:prstGeom prst="rect">
             <a:avLst/>
@@ -14253,7 +14253,7 @@
                 <a:ea typeface="Hanken Grotesk" pitchFamily="34" charset="-122"/>
                 <a:cs typeface="Hanken Grotesk" pitchFamily="34" charset="-120"/>
               </a:rPr>
-              <a:t>Stage 1 · Ad minim</a:t>
+              <a:t>Stage 1 · Ad</a:t>
             </a:r>
             <a:endParaRPr lang="en-US" sz="1150" dirty="0"/>
           </a:p>
@@ -14284,12 +14284,12 @@
         </p:nvSpPr>
         <p:spPr>
           <a:xfrm>
-            <a:off x="3941613" y="1645920"/>
-            <a:ext cx="1865925" cy="548640"/>
+            <a:off x="4056827" y="1691640"/>
+            <a:ext cx="1725107" cy="640080"/>
           </a:xfrm>
           <a:prstGeom prst="roundRect">
             <a:avLst>
-              <a:gd name="adj" fmla="val 13333"/>
+              <a:gd name="adj" fmla="val 11429"/>
             </a:avLst>
           </a:prstGeom>
           <a:solidFill>
@@ -14311,8 +14311,8 @@
         </p:nvSpPr>
         <p:spPr>
           <a:xfrm>
-            <a:off x="4069629" y="1645920"/>
-            <a:ext cx="1683045" cy="548640"/>
+            <a:off x="4203131" y="1691640"/>
+            <a:ext cx="1505651" cy="640080"/>
           </a:xfrm>
           <a:prstGeom prst="rect">
             <a:avLst/>
@@ -14336,7 +14336,7 @@
                 <a:ea typeface="Hanken Grotesk" pitchFamily="34" charset="-122"/>
                 <a:cs typeface="Hanken Grotesk" pitchFamily="34" charset="-120"/>
               </a:rPr>
-              <a:t>Stage 2 · Laboris nisi</a:t>
+              <a:t>Stage 2 · Laboris</a:t>
             </a:r>
             <a:endParaRPr lang="en-US" sz="1150" dirty="0"/>
           </a:p>
@@ -14367,12 +14367,12 @@
         </p:nvSpPr>
         <p:spPr>
           <a:xfrm>
-            <a:off x="5917265" y="1645920"/>
-            <a:ext cx="1865925" cy="548640"/>
+            <a:off x="5964814" y="1691640"/>
+            <a:ext cx="1725107" cy="640080"/>
           </a:xfrm>
           <a:prstGeom prst="roundRect">
             <a:avLst>
-              <a:gd name="adj" fmla="val 13333"/>
+              <a:gd name="adj" fmla="val 11429"/>
             </a:avLst>
           </a:prstGeom>
           <a:solidFill>
@@ -14394,8 +14394,8 @@
         </p:nvSpPr>
         <p:spPr>
           <a:xfrm>
-            <a:off x="6045281" y="1645920"/>
-            <a:ext cx="1683045" cy="548640"/>
+            <a:off x="6111118" y="1691640"/>
+            <a:ext cx="1505651" cy="640080"/>
           </a:xfrm>
           <a:prstGeom prst="rect">
             <a:avLst/>
@@ -14419,7 +14419,7 @@
                 <a:ea typeface="Hanken Grotesk" pitchFamily="34" charset="-122"/>
                 <a:cs typeface="Hanken Grotesk" pitchFamily="34" charset="-120"/>
               </a:rPr>
-              <a:t>Stage 3 · Consequat duis</a:t>
+              <a:t>Stage 3 · Consequat</a:t>
             </a:r>
             <a:endParaRPr lang="en-US" sz="1150" dirty="0"/>
           </a:p>
@@ -14450,12 +14450,12 @@
         </p:nvSpPr>
         <p:spPr>
           <a:xfrm>
-            <a:off x="7892918" y="1645920"/>
-            <a:ext cx="1865925" cy="548640"/>
+            <a:off x="7872801" y="1691640"/>
+            <a:ext cx="1725107" cy="640080"/>
           </a:xfrm>
           <a:prstGeom prst="roundRect">
             <a:avLst>
-              <a:gd name="adj" fmla="val 13333"/>
+              <a:gd name="adj" fmla="val 11429"/>
             </a:avLst>
           </a:prstGeom>
           <a:solidFill>
@@ -14477,8 +14477,8 @@
         </p:nvSpPr>
         <p:spPr>
           <a:xfrm>
-            <a:off x="8020934" y="1645920"/>
-            <a:ext cx="1683045" cy="548640"/>
+            <a:off x="8019105" y="1691640"/>
+            <a:ext cx="1505651" cy="640080"/>
           </a:xfrm>
           <a:prstGeom prst="rect">
             <a:avLst/>
@@ -14502,7 +14502,7 @@
                 <a:ea typeface="Hanken Grotesk" pitchFamily="34" charset="-122"/>
                 <a:cs typeface="Hanken Grotesk" pitchFamily="34" charset="-120"/>
               </a:rPr>
-              <a:t>Stage 4 · In voluptate</a:t>
+              <a:t>Stage 4 · In</a:t>
             </a:r>
             <a:endParaRPr lang="en-US" sz="1150" dirty="0"/>
           </a:p>
@@ -14533,12 +14533,12 @@
         </p:nvSpPr>
         <p:spPr>
           <a:xfrm>
-            <a:off x="9868571" y="1645920"/>
-            <a:ext cx="1865925" cy="548640"/>
+            <a:off x="9780788" y="1691640"/>
+            <a:ext cx="1725107" cy="640080"/>
           </a:xfrm>
           <a:prstGeom prst="roundRect">
             <a:avLst>
-              <a:gd name="adj" fmla="val 13333"/>
+              <a:gd name="adj" fmla="val 11429"/>
             </a:avLst>
           </a:prstGeom>
           <a:solidFill>
@@ -14560,8 +14560,8 @@
         </p:nvSpPr>
         <p:spPr>
           <a:xfrm>
-            <a:off x="9996587" y="1645920"/>
-            <a:ext cx="1683045" cy="548640"/>
+            <a:off x="9927092" y="1691640"/>
+            <a:ext cx="1505651" cy="640080"/>
           </a:xfrm>
           <a:prstGeom prst="rect">
             <a:avLst/>
@@ -14585,7 +14585,7 @@
                 <a:ea typeface="Hanken Grotesk" pitchFamily="34" charset="-122"/>
                 <a:cs typeface="Hanken Grotesk" pitchFamily="34" charset="-120"/>
               </a:rPr>
-              <a:t>Stage 5 · Fugiat nulla</a:t>
+              <a:t>Stage 5 · Fugiat</a:t>
             </a:r>
             <a:endParaRPr lang="en-US" sz="1150" dirty="0"/>
           </a:p>
@@ -14616,8 +14616,8 @@
         </p:nvSpPr>
         <p:spPr>
           <a:xfrm>
-            <a:off x="457200" y="2331720"/>
-            <a:ext cx="1371600" cy="457200"/>
+            <a:off x="685800" y="2514600"/>
+            <a:ext cx="1280160" cy="411480"/>
           </a:xfrm>
           <a:prstGeom prst="rect">
             <a:avLst/>
@@ -14655,12 +14655,12 @@
         </p:nvSpPr>
         <p:spPr>
           <a:xfrm>
-            <a:off x="1965960" y="2331720"/>
-            <a:ext cx="1865925" cy="457200"/>
+            <a:off x="2148840" y="2514600"/>
+            <a:ext cx="1725107" cy="411480"/>
           </a:xfrm>
           <a:prstGeom prst="roundRect">
             <a:avLst>
-              <a:gd name="adj" fmla="val 16000"/>
+              <a:gd name="adj" fmla="val 17778"/>
             </a:avLst>
           </a:prstGeom>
           <a:solidFill>
@@ -14682,7 +14682,7 @@
         </p:nvSpPr>
         <p:spPr>
           <a:xfrm>
-            <a:off x="2093976" y="2487168"/>
+            <a:off x="2295144" y="2647188"/>
             <a:ext cx="146304" cy="146304"/>
           </a:xfrm>
           <a:prstGeom prst="ellipse">
@@ -14707,8 +14707,8 @@
         </p:nvSpPr>
         <p:spPr>
           <a:xfrm>
-            <a:off x="2313432" y="2331720"/>
-            <a:ext cx="1454445" cy="457200"/>
+            <a:off x="2532888" y="2514600"/>
+            <a:ext cx="1267907" cy="411480"/>
           </a:xfrm>
           <a:prstGeom prst="rect">
             <a:avLst/>
@@ -14760,12 +14760,12 @@
         </p:nvSpPr>
         <p:spPr>
           <a:xfrm>
-            <a:off x="3941613" y="2331720"/>
-            <a:ext cx="1865925" cy="457200"/>
+            <a:off x="4056827" y="2514600"/>
+            <a:ext cx="1725107" cy="411480"/>
           </a:xfrm>
           <a:prstGeom prst="roundRect">
             <a:avLst>
-              <a:gd name="adj" fmla="val 16000"/>
+              <a:gd name="adj" fmla="val 17778"/>
             </a:avLst>
           </a:prstGeom>
           <a:solidFill>
@@ -14787,7 +14787,7 @@
         </p:nvSpPr>
         <p:spPr>
           <a:xfrm>
-            <a:off x="4069629" y="2487168"/>
+            <a:off x="4203131" y="2647188"/>
             <a:ext cx="146304" cy="146304"/>
           </a:xfrm>
           <a:prstGeom prst="ellipse">
@@ -14812,8 +14812,8 @@
         </p:nvSpPr>
         <p:spPr>
           <a:xfrm>
-            <a:off x="4289085" y="2331720"/>
-            <a:ext cx="1454445" cy="457200"/>
+            <a:off x="4440875" y="2514600"/>
+            <a:ext cx="1267907" cy="411480"/>
           </a:xfrm>
           <a:prstGeom prst="rect">
             <a:avLst/>
@@ -14865,12 +14865,12 @@
         </p:nvSpPr>
         <p:spPr>
           <a:xfrm>
-            <a:off x="5917265" y="2331720"/>
-            <a:ext cx="1865925" cy="457200"/>
+            <a:off x="5964814" y="2514600"/>
+            <a:ext cx="1725107" cy="411480"/>
           </a:xfrm>
           <a:prstGeom prst="roundRect">
             <a:avLst>
-              <a:gd name="adj" fmla="val 16000"/>
+              <a:gd name="adj" fmla="val 17778"/>
             </a:avLst>
           </a:prstGeom>
           <a:solidFill>
@@ -14892,7 +14892,7 @@
         </p:nvSpPr>
         <p:spPr>
           <a:xfrm>
-            <a:off x="6045281" y="2487168"/>
+            <a:off x="6111118" y="2647188"/>
             <a:ext cx="146304" cy="146304"/>
           </a:xfrm>
           <a:prstGeom prst="ellipse">
@@ -14917,8 +14917,8 @@
         </p:nvSpPr>
         <p:spPr>
           <a:xfrm>
-            <a:off x="6264737" y="2331720"/>
-            <a:ext cx="1454445" cy="457200"/>
+            <a:off x="6348862" y="2514600"/>
+            <a:ext cx="1267907" cy="411480"/>
           </a:xfrm>
           <a:prstGeom prst="rect">
             <a:avLst/>
@@ -14970,12 +14970,12 @@
         </p:nvSpPr>
         <p:spPr>
           <a:xfrm>
-            <a:off x="7892918" y="2331720"/>
-            <a:ext cx="1865925" cy="457200"/>
+            <a:off x="7872801" y="2514600"/>
+            <a:ext cx="1725107" cy="411480"/>
           </a:xfrm>
           <a:prstGeom prst="roundRect">
             <a:avLst>
-              <a:gd name="adj" fmla="val 16000"/>
+              <a:gd name="adj" fmla="val 17778"/>
             </a:avLst>
           </a:prstGeom>
           <a:solidFill>
@@ -14997,7 +14997,7 @@
         </p:nvSpPr>
         <p:spPr>
           <a:xfrm>
-            <a:off x="8020934" y="2487168"/>
+            <a:off x="8019105" y="2647188"/>
             <a:ext cx="146304" cy="146304"/>
           </a:xfrm>
           <a:prstGeom prst="ellipse">
@@ -15022,8 +15022,8 @@
         </p:nvSpPr>
         <p:spPr>
           <a:xfrm>
-            <a:off x="8240390" y="2331720"/>
-            <a:ext cx="1454445" cy="457200"/>
+            <a:off x="8256849" y="2514600"/>
+            <a:ext cx="1267907" cy="411480"/>
           </a:xfrm>
           <a:prstGeom prst="rect">
             <a:avLst/>
@@ -15075,12 +15075,12 @@
         </p:nvSpPr>
         <p:spPr>
           <a:xfrm>
-            <a:off x="9868571" y="2331720"/>
-            <a:ext cx="1865925" cy="457200"/>
+            <a:off x="9780788" y="2514600"/>
+            <a:ext cx="1725107" cy="411480"/>
           </a:xfrm>
           <a:prstGeom prst="roundRect">
             <a:avLst>
-              <a:gd name="adj" fmla="val 16000"/>
+              <a:gd name="adj" fmla="val 17778"/>
             </a:avLst>
           </a:prstGeom>
           <a:solidFill>
@@ -15102,7 +15102,7 @@
         </p:nvSpPr>
         <p:spPr>
           <a:xfrm>
-            <a:off x="9996587" y="2487168"/>
+            <a:off x="9927092" y="2647188"/>
             <a:ext cx="146304" cy="146304"/>
           </a:xfrm>
           <a:prstGeom prst="ellipse">
@@ -15127,8 +15127,8 @@
         </p:nvSpPr>
         <p:spPr>
           <a:xfrm>
-            <a:off x="10216043" y="2331720"/>
-            <a:ext cx="1454445" cy="457200"/>
+            <a:off x="10164836" y="2514600"/>
+            <a:ext cx="1267907" cy="411480"/>
           </a:xfrm>
           <a:prstGeom prst="rect">
             <a:avLst/>
@@ -15180,8 +15180,8 @@
         </p:nvSpPr>
         <p:spPr>
           <a:xfrm>
-            <a:off x="457200" y="2880360"/>
-            <a:ext cx="1371600" cy="914400"/>
+            <a:off x="685800" y="3108960"/>
+            <a:ext cx="1280160" cy="777240"/>
           </a:xfrm>
           <a:prstGeom prst="rect">
             <a:avLst/>
@@ -15219,12 +15219,12 @@
         </p:nvSpPr>
         <p:spPr>
           <a:xfrm>
-            <a:off x="1965960" y="2880360"/>
-            <a:ext cx="1865925" cy="914400"/>
+            <a:off x="2148840" y="3108960"/>
+            <a:ext cx="1725107" cy="777240"/>
           </a:xfrm>
           <a:prstGeom prst="roundRect">
             <a:avLst>
-              <a:gd name="adj" fmla="val 8000"/>
+              <a:gd name="adj" fmla="val 9412"/>
             </a:avLst>
           </a:prstGeom>
           <a:solidFill>
@@ -15246,8 +15246,8 @@
         </p:nvSpPr>
         <p:spPr>
           <a:xfrm>
-            <a:off x="2093976" y="2990088"/>
-            <a:ext cx="1609893" cy="731520"/>
+            <a:off x="2295144" y="3236976"/>
+            <a:ext cx="1432499" cy="576072"/>
           </a:xfrm>
           <a:prstGeom prst="rect">
             <a:avLst/>
@@ -15271,7 +15271,7 @@
                 <a:ea typeface="Hanken Grotesk" pitchFamily="34" charset="-122"/>
                 <a:cs typeface="Hanken Grotesk" pitchFamily="34" charset="-120"/>
               </a:rPr>
-              <a:t>In voluptate velit esse cillum dolore eu.</a:t>
+              <a:t>In voluptate velit esse cillum.</a:t>
             </a:r>
             <a:endParaRPr lang="en-US" sz="1150" dirty="0"/>
           </a:p>
@@ -15285,12 +15285,12 @@
         </p:nvSpPr>
         <p:spPr>
           <a:xfrm>
-            <a:off x="3941613" y="2880360"/>
-            <a:ext cx="1865925" cy="914400"/>
+            <a:off x="4056827" y="3108960"/>
+            <a:ext cx="1725107" cy="777240"/>
           </a:xfrm>
           <a:prstGeom prst="roundRect">
             <a:avLst>
-              <a:gd name="adj" fmla="val 8000"/>
+              <a:gd name="adj" fmla="val 9412"/>
             </a:avLst>
           </a:prstGeom>
           <a:solidFill>
@@ -15312,8 +15312,8 @@
         </p:nvSpPr>
         <p:spPr>
           <a:xfrm>
-            <a:off x="4069629" y="2990088"/>
-            <a:ext cx="1609893" cy="731520"/>
+            <a:off x="4203131" y="3236976"/>
+            <a:ext cx="1432499" cy="576072"/>
           </a:xfrm>
           <a:prstGeom prst="rect">
             <a:avLst/>
@@ -15337,7 +15337,7 @@
                 <a:ea typeface="Hanken Grotesk" pitchFamily="34" charset="-122"/>
                 <a:cs typeface="Hanken Grotesk" pitchFamily="34" charset="-120"/>
               </a:rPr>
-              <a:t>Fugiat nulla pariatur excepteur sint occaecat cupidatat.</a:t>
+              <a:t>Fugiat nulla pariatur excepteur sint.</a:t>
             </a:r>
             <a:endParaRPr lang="en-US" sz="1150" dirty="0"/>
           </a:p>
@@ -15351,12 +15351,12 @@
         </p:nvSpPr>
         <p:spPr>
           <a:xfrm>
-            <a:off x="5917265" y="2880360"/>
-            <a:ext cx="1865925" cy="914400"/>
+            <a:off x="5964814" y="3108960"/>
+            <a:ext cx="1725107" cy="777240"/>
           </a:xfrm>
           <a:prstGeom prst="roundRect">
             <a:avLst>
-              <a:gd name="adj" fmla="val 8000"/>
+              <a:gd name="adj" fmla="val 9412"/>
             </a:avLst>
           </a:prstGeom>
           <a:solidFill>
@@ -15378,8 +15378,8 @@
         </p:nvSpPr>
         <p:spPr>
           <a:xfrm>
-            <a:off x="6045281" y="2990088"/>
-            <a:ext cx="1609893" cy="731520"/>
+            <a:off x="6111118" y="3236976"/>
+            <a:ext cx="1432499" cy="576072"/>
           </a:xfrm>
           <a:prstGeom prst="rect">
             <a:avLst/>
@@ -15403,7 +15403,7 @@
                 <a:ea typeface="Hanken Grotesk" pitchFamily="34" charset="-122"/>
                 <a:cs typeface="Hanken Grotesk" pitchFamily="34" charset="-120"/>
               </a:rPr>
-              <a:t>Non proident sunt in culpa qui officia.</a:t>
+              <a:t>Non proident sunt in culpa.</a:t>
             </a:r>
             <a:endParaRPr lang="en-US" sz="1150" dirty="0"/>
           </a:p>
@@ -15417,12 +15417,12 @@
         </p:nvSpPr>
         <p:spPr>
           <a:xfrm>
-            <a:off x="7892918" y="2880360"/>
-            <a:ext cx="1865925" cy="914400"/>
+            <a:off x="7872801" y="3108960"/>
+            <a:ext cx="1725107" cy="777240"/>
           </a:xfrm>
           <a:prstGeom prst="roundRect">
             <a:avLst>
-              <a:gd name="adj" fmla="val 8000"/>
+              <a:gd name="adj" fmla="val 9412"/>
             </a:avLst>
           </a:prstGeom>
           <a:solidFill>
@@ -15444,8 +15444,8 @@
         </p:nvSpPr>
         <p:spPr>
           <a:xfrm>
-            <a:off x="8020934" y="2990088"/>
-            <a:ext cx="1609893" cy="731520"/>
+            <a:off x="8019105" y="3236976"/>
+            <a:ext cx="1432499" cy="576072"/>
           </a:xfrm>
           <a:prstGeom prst="rect">
             <a:avLst/>
@@ -15469,7 +15469,7 @@
                 <a:ea typeface="Hanken Grotesk" pitchFamily="34" charset="-122"/>
                 <a:cs typeface="Hanken Grotesk" pitchFamily="34" charset="-120"/>
               </a:rPr>
-              <a:t>Deserunt mollit anim id est laborum curabitur.</a:t>
+              <a:t>Deserunt mollit anim id est.</a:t>
             </a:r>
             <a:endParaRPr lang="en-US" sz="1150" dirty="0"/>
           </a:p>
@@ -15483,12 +15483,12 @@
         </p:nvSpPr>
         <p:spPr>
           <a:xfrm>
-            <a:off x="9868571" y="2880360"/>
-            <a:ext cx="1865925" cy="914400"/>
+            <a:off x="9780788" y="3108960"/>
+            <a:ext cx="1725107" cy="777240"/>
           </a:xfrm>
           <a:prstGeom prst="roundRect">
             <a:avLst>
-              <a:gd name="adj" fmla="val 8000"/>
+              <a:gd name="adj" fmla="val 9412"/>
             </a:avLst>
           </a:prstGeom>
           <a:solidFill>
@@ -15510,8 +15510,8 @@
         </p:nvSpPr>
         <p:spPr>
           <a:xfrm>
-            <a:off x="9996587" y="2990088"/>
-            <a:ext cx="1609893" cy="731520"/>
+            <a:off x="9927092" y="3236976"/>
+            <a:ext cx="1432499" cy="576072"/>
           </a:xfrm>
           <a:prstGeom prst="rect">
             <a:avLst/>
@@ -15535,7 +15535,7 @@
                 <a:ea typeface="Hanken Grotesk" pitchFamily="34" charset="-122"/>
                 <a:cs typeface="Hanken Grotesk" pitchFamily="34" charset="-120"/>
               </a:rPr>
-              <a:t>Pretium tincidunt lacus nulla gravida orci a.</a:t>
+              <a:t>Pretium tincidunt lacus nulla gravida.</a:t>
             </a:r>
             <a:endParaRPr lang="en-US" sz="1150" dirty="0"/>
           </a:p>
@@ -15549,8 +15549,8 @@
         </p:nvSpPr>
         <p:spPr>
           <a:xfrm>
-            <a:off x="457200" y="3886200"/>
-            <a:ext cx="1371600" cy="1097280"/>
+            <a:off x="685800" y="4069080"/>
+            <a:ext cx="1280160" cy="914400"/>
           </a:xfrm>
           <a:prstGeom prst="rect">
             <a:avLst/>
@@ -15588,12 +15588,12 @@
         </p:nvSpPr>
         <p:spPr>
           <a:xfrm>
-            <a:off x="1965960" y="3886200"/>
-            <a:ext cx="9768535" cy="1097280"/>
+            <a:off x="2148840" y="4069080"/>
+            <a:ext cx="9357055" cy="914400"/>
           </a:xfrm>
           <a:prstGeom prst="roundRect">
             <a:avLst>
-              <a:gd name="adj" fmla="val 8333"/>
+              <a:gd name="adj" fmla="val 10000"/>
             </a:avLst>
           </a:prstGeom>
           <a:solidFill>
@@ -15615,8 +15615,8 @@
         </p:nvSpPr>
         <p:spPr>
           <a:xfrm flipV="1">
-            <a:off x="2898922" y="4210263"/>
-            <a:ext cx="1975653" cy="52669"/>
+            <a:off x="3011394" y="4355104"/>
+            <a:ext cx="1907987" cy="28529"/>
           </a:xfrm>
           <a:prstGeom prst="line">
             <a:avLst/>
@@ -15638,8 +15638,8 @@
         </p:nvSpPr>
         <p:spPr>
           <a:xfrm flipV="1">
-            <a:off x="4874575" y="4153205"/>
-            <a:ext cx="1975653" cy="57059"/>
+            <a:off x="4919381" y="4324198"/>
+            <a:ext cx="1907987" cy="30907"/>
           </a:xfrm>
           <a:prstGeom prst="line">
             <a:avLst/>
@@ -15661,8 +15661,8 @@
         </p:nvSpPr>
         <p:spPr>
           <a:xfrm>
-            <a:off x="6850228" y="4153205"/>
-            <a:ext cx="1975653" cy="65837"/>
+            <a:off x="6827368" y="4324198"/>
+            <a:ext cx="1907987" cy="35662"/>
           </a:xfrm>
           <a:prstGeom prst="line">
             <a:avLst/>
@@ -15684,8 +15684,8 @@
         </p:nvSpPr>
         <p:spPr>
           <a:xfrm flipV="1">
-            <a:off x="8825880" y="4131259"/>
-            <a:ext cx="1975653" cy="87782"/>
+            <a:off x="8735355" y="4312310"/>
+            <a:ext cx="1907987" cy="47549"/>
           </a:xfrm>
           <a:prstGeom prst="line">
             <a:avLst/>
@@ -15707,7 +15707,7 @@
         </p:nvSpPr>
         <p:spPr>
           <a:xfrm>
-            <a:off x="2816626" y="4180637"/>
+            <a:off x="2929098" y="4301338"/>
             <a:ext cx="164592" cy="164592"/>
           </a:xfrm>
           <a:prstGeom prst="ellipse">
@@ -15732,8 +15732,8 @@
         </p:nvSpPr>
         <p:spPr>
           <a:xfrm>
-            <a:off x="1965960" y="4381805"/>
-            <a:ext cx="1865925" cy="237744"/>
+            <a:off x="2148840" y="4502506"/>
+            <a:ext cx="1725107" cy="237744"/>
           </a:xfrm>
           <a:prstGeom prst="rect">
             <a:avLst/>
@@ -15771,7 +15771,7 @@
         </p:nvSpPr>
         <p:spPr>
           <a:xfrm>
-            <a:off x="4792279" y="4127967"/>
+            <a:off x="4837085" y="4272808"/>
             <a:ext cx="164592" cy="164592"/>
           </a:xfrm>
           <a:prstGeom prst="ellipse">
@@ -15796,8 +15796,8 @@
         </p:nvSpPr>
         <p:spPr>
           <a:xfrm>
-            <a:off x="3941613" y="4329135"/>
-            <a:ext cx="1865925" cy="237744"/>
+            <a:off x="4056827" y="4473976"/>
+            <a:ext cx="1725107" cy="237744"/>
           </a:xfrm>
           <a:prstGeom prst="rect">
             <a:avLst/>
@@ -15835,7 +15835,7 @@
         </p:nvSpPr>
         <p:spPr>
           <a:xfrm>
-            <a:off x="6767932" y="4070909"/>
+            <a:off x="6745072" y="4241902"/>
             <a:ext cx="164592" cy="164592"/>
           </a:xfrm>
           <a:prstGeom prst="ellipse">
@@ -15860,8 +15860,8 @@
         </p:nvSpPr>
         <p:spPr>
           <a:xfrm>
-            <a:off x="5917265" y="4272077"/>
-            <a:ext cx="1865925" cy="237744"/>
+            <a:off x="5964814" y="4443070"/>
+            <a:ext cx="1725107" cy="237744"/>
           </a:xfrm>
           <a:prstGeom prst="rect">
             <a:avLst/>
@@ -15899,7 +15899,7 @@
         </p:nvSpPr>
         <p:spPr>
           <a:xfrm>
-            <a:off x="8743584" y="4136746"/>
+            <a:off x="8653059" y="4277563"/>
             <a:ext cx="164592" cy="164592"/>
           </a:xfrm>
           <a:prstGeom prst="ellipse">
@@ -15924,8 +15924,8 @@
         </p:nvSpPr>
         <p:spPr>
           <a:xfrm>
-            <a:off x="7892918" y="4337914"/>
-            <a:ext cx="1865925" cy="237744"/>
+            <a:off x="7872801" y="4478731"/>
+            <a:ext cx="1725107" cy="237744"/>
           </a:xfrm>
           <a:prstGeom prst="rect">
             <a:avLst/>
@@ -15963,7 +15963,7 @@
         </p:nvSpPr>
         <p:spPr>
           <a:xfrm>
-            <a:off x="10719237" y="4048963"/>
+            <a:off x="10561046" y="4230014"/>
             <a:ext cx="164592" cy="164592"/>
           </a:xfrm>
           <a:prstGeom prst="ellipse">
@@ -15988,8 +15988,8 @@
         </p:nvSpPr>
         <p:spPr>
           <a:xfrm>
-            <a:off x="9868571" y="4250131"/>
-            <a:ext cx="1865925" cy="237744"/>
+            <a:off x="9780788" y="4431182"/>
+            <a:ext cx="1725107" cy="237744"/>
           </a:xfrm>
           <a:prstGeom prst="rect">
             <a:avLst/>
@@ -16027,8 +16027,8 @@
         </p:nvSpPr>
         <p:spPr>
           <a:xfrm>
-            <a:off x="457200" y="5074920"/>
-            <a:ext cx="1371600" cy="1097280"/>
+            <a:off x="685800" y="5166360"/>
+            <a:ext cx="1280160" cy="594360"/>
           </a:xfrm>
           <a:prstGeom prst="rect">
             <a:avLst/>
@@ -16066,12 +16066,12 @@
         </p:nvSpPr>
         <p:spPr>
           <a:xfrm>
-            <a:off x="1965960" y="5074920"/>
-            <a:ext cx="1865925" cy="1097280"/>
+            <a:off x="2148840" y="5166360"/>
+            <a:ext cx="1725107" cy="594360"/>
           </a:xfrm>
           <a:prstGeom prst="roundRect">
             <a:avLst>
-              <a:gd name="adj" fmla="val 6667"/>
+              <a:gd name="adj" fmla="val 12308"/>
             </a:avLst>
           </a:prstGeom>
           <a:solidFill>
@@ -16093,8 +16093,8 @@
         </p:nvSpPr>
         <p:spPr>
           <a:xfrm>
-            <a:off x="2093976" y="5184648"/>
-            <a:ext cx="1609893" cy="914400"/>
+            <a:off x="2295144" y="5294376"/>
+            <a:ext cx="1432499" cy="393192"/>
           </a:xfrm>
           <a:prstGeom prst="rect">
             <a:avLst/>
@@ -16118,7 +16118,7 @@
                 <a:ea typeface="Hanken Grotesk" pitchFamily="34" charset="-122"/>
                 <a:cs typeface="Hanken Grotesk" pitchFamily="34" charset="-120"/>
               </a:rPr>
-              <a:t>Nibh euismod gravida lorem ipsum dolor.</a:t>
+              <a:t>Nibh euismod gravida lorem.</a:t>
             </a:r>
             <a:endParaRPr lang="en-US" sz="1150" dirty="0"/>
           </a:p>
@@ -16132,12 +16132,12 @@
         </p:nvSpPr>
         <p:spPr>
           <a:xfrm>
-            <a:off x="3941613" y="5074920"/>
-            <a:ext cx="1865925" cy="1097280"/>
+            <a:off x="4056827" y="5166360"/>
+            <a:ext cx="1725107" cy="594360"/>
           </a:xfrm>
           <a:prstGeom prst="roundRect">
             <a:avLst>
-              <a:gd name="adj" fmla="val 6667"/>
+              <a:gd name="adj" fmla="val 12308"/>
             </a:avLst>
           </a:prstGeom>
           <a:solidFill>
@@ -16159,8 +16159,8 @@
         </p:nvSpPr>
         <p:spPr>
           <a:xfrm>
-            <a:off x="4069629" y="5184648"/>
-            <a:ext cx="1609893" cy="914400"/>
+            <a:off x="4203131" y="5294376"/>
+            <a:ext cx="1432499" cy="393192"/>
           </a:xfrm>
           <a:prstGeom prst="rect">
             <a:avLst/>
@@ -16184,7 +16184,7 @@
                 <a:ea typeface="Hanken Grotesk" pitchFamily="34" charset="-122"/>
                 <a:cs typeface="Hanken Grotesk" pitchFamily="34" charset="-120"/>
               </a:rPr>
-              <a:t>Amet consectetur adipiscing elit sed do.</a:t>
+              <a:t>Amet consectetur adipiscing elit.</a:t>
             </a:r>
             <a:endParaRPr lang="en-US" sz="1150" dirty="0"/>
           </a:p>
@@ -16198,12 +16198,12 @@
         </p:nvSpPr>
         <p:spPr>
           <a:xfrm>
-            <a:off x="5917265" y="5074920"/>
-            <a:ext cx="1865925" cy="1097280"/>
+            <a:off x="5964814" y="5166360"/>
+            <a:ext cx="1725107" cy="594360"/>
           </a:xfrm>
           <a:prstGeom prst="roundRect">
             <a:avLst>
-              <a:gd name="adj" fmla="val 6667"/>
+              <a:gd name="adj" fmla="val 12308"/>
             </a:avLst>
           </a:prstGeom>
           <a:solidFill>
@@ -16225,8 +16225,8 @@
         </p:nvSpPr>
         <p:spPr>
           <a:xfrm>
-            <a:off x="6045281" y="5184648"/>
-            <a:ext cx="1609893" cy="914400"/>
+            <a:off x="6111118" y="5294376"/>
+            <a:ext cx="1432499" cy="393192"/>
           </a:xfrm>
           <a:prstGeom prst="rect">
             <a:avLst/>
@@ -16250,7 +16250,7 @@
                 <a:ea typeface="Hanken Grotesk" pitchFamily="34" charset="-122"/>
                 <a:cs typeface="Hanken Grotesk" pitchFamily="34" charset="-120"/>
               </a:rPr>
-              <a:t>Tempor incididunt ut labore et dolore.</a:t>
+              <a:t>Tempor incididunt ut labore.</a:t>
             </a:r>
             <a:endParaRPr lang="en-US" sz="1150" dirty="0"/>
           </a:p>
@@ -16264,12 +16264,12 @@
         </p:nvSpPr>
         <p:spPr>
           <a:xfrm>
-            <a:off x="7892918" y="5074920"/>
-            <a:ext cx="1865925" cy="1097280"/>
+            <a:off x="7872801" y="5166360"/>
+            <a:ext cx="1725107" cy="594360"/>
           </a:xfrm>
           <a:prstGeom prst="roundRect">
             <a:avLst>
-              <a:gd name="adj" fmla="val 6667"/>
+              <a:gd name="adj" fmla="val 12308"/>
             </a:avLst>
           </a:prstGeom>
           <a:solidFill>
@@ -16291,8 +16291,8 @@
         </p:nvSpPr>
         <p:spPr>
           <a:xfrm>
-            <a:off x="8020934" y="5184648"/>
-            <a:ext cx="1609893" cy="914400"/>
+            <a:off x="8019105" y="5294376"/>
+            <a:ext cx="1432499" cy="393192"/>
           </a:xfrm>
           <a:prstGeom prst="rect">
             <a:avLst/>
@@ -16316,7 +16316,7 @@
                 <a:ea typeface="Hanken Grotesk" pitchFamily="34" charset="-122"/>
                 <a:cs typeface="Hanken Grotesk" pitchFamily="34" charset="-120"/>
               </a:rPr>
-              <a:t>Aliqua ut enim ad minim veniam.</a:t>
+              <a:t>Aliqua ut enim ad.</a:t>
             </a:r>
             <a:endParaRPr lang="en-US" sz="1150" dirty="0"/>
           </a:p>
@@ -16330,12 +16330,12 @@
         </p:nvSpPr>
         <p:spPr>
           <a:xfrm>
-            <a:off x="9868571" y="5074920"/>
-            <a:ext cx="1865925" cy="1097280"/>
+            <a:off x="9780788" y="5166360"/>
+            <a:ext cx="1725107" cy="594360"/>
           </a:xfrm>
           <a:prstGeom prst="roundRect">
             <a:avLst>
-              <a:gd name="adj" fmla="val 6667"/>
+              <a:gd name="adj" fmla="val 12308"/>
             </a:avLst>
           </a:prstGeom>
           <a:solidFill>
@@ -16357,8 +16357,8 @@
         </p:nvSpPr>
         <p:spPr>
           <a:xfrm>
-            <a:off x="9996587" y="5184648"/>
-            <a:ext cx="1609893" cy="914400"/>
+            <a:off x="9927092" y="5294376"/>
+            <a:ext cx="1432499" cy="393192"/>
           </a:xfrm>
           <a:prstGeom prst="rect">
             <a:avLst/>
@@ -16382,7 +16382,7 @@
                 <a:ea typeface="Hanken Grotesk" pitchFamily="34" charset="-122"/>
                 <a:cs typeface="Hanken Grotesk" pitchFamily="34" charset="-120"/>
               </a:rPr>
-              <a:t>Nostrud exercitation ullamco laboris nisi ut.</a:t>
+              <a:t>Nostrud exercitation ullamco laboris.</a:t>
             </a:r>
             <a:endParaRPr lang="en-US" sz="1150" dirty="0"/>
           </a:p>
@@ -16428,8 +16428,8 @@
         </p:nvSpPr>
         <p:spPr>
           <a:xfrm>
-            <a:off x="457200" y="384048"/>
-            <a:ext cx="8961120" cy="274320"/>
+            <a:off x="685800" y="502920"/>
+            <a:ext cx="8595360" cy="274320"/>
           </a:xfrm>
           <a:prstGeom prst="rect">
             <a:avLst/>
@@ -16467,8 +16467,8 @@
         </p:nvSpPr>
         <p:spPr>
           <a:xfrm>
-            <a:off x="457200" y="676656"/>
-            <a:ext cx="11274552" cy="868680"/>
+            <a:off x="685800" y="804672"/>
+            <a:ext cx="10820095" cy="566928"/>
           </a:xfrm>
           <a:prstGeom prst="rect">
             <a:avLst/>
@@ -16487,7 +16487,7 @@
               <a:buNone/>
             </a:pPr>
             <a:r>
-              <a:rPr lang="en-US" sz="3000" b="1" dirty="0">
+              <a:rPr lang="en-US" sz="2800" b="1" dirty="0">
                 <a:solidFill>
                   <a:srgbClr val="222731"/>
                 </a:solidFill>
@@ -16495,9 +16495,9 @@
                 <a:ea typeface="Bricolage Grotesque" pitchFamily="34" charset="-122"/>
                 <a:cs typeface="Bricolage Grotesque" pitchFamily="34" charset="-120"/>
               </a:rPr>
-              <a:t>Ex ea commodo consequat duis aute irure dolor in</a:t>
-            </a:r>
-            <a:endParaRPr lang="en-US" sz="3000" dirty="0"/>
+              <a:t>Ex ea commodo consequat duis aute</a:t>
+            </a:r>
+            <a:endParaRPr lang="en-US" sz="2800" dirty="0"/>
           </a:p>
         </p:txBody>
       </p:sp>
@@ -16509,7 +16509,7 @@
         </p:nvSpPr>
         <p:spPr>
           <a:xfrm>
-            <a:off x="457200" y="6400800"/>
+            <a:off x="685800" y="6400800"/>
             <a:ext cx="4389120" cy="256032"/>
           </a:xfrm>
           <a:prstGeom prst="rect">
@@ -16549,7 +16549,7 @@
         <p:spPr>
           <a:xfrm>
             <a:off x="4937760" y="6400800"/>
-            <a:ext cx="5943600" cy="256032"/>
+            <a:ext cx="5790895" cy="256032"/>
           </a:xfrm>
           <a:prstGeom prst="rect">
             <a:avLst/>
@@ -16587,7 +16587,7 @@
         </p:nvSpPr>
         <p:spPr>
           <a:xfrm>
-            <a:off x="11091672" y="6400800"/>
+            <a:off x="10865815" y="6400800"/>
             <a:ext cx="640080" cy="256032"/>
           </a:xfrm>
           <a:prstGeom prst="rect">
@@ -16626,7 +16626,7 @@
         </p:nvSpPr>
         <p:spPr>
           <a:xfrm>
-            <a:off x="8442655" y="384048"/>
+            <a:off x="8214055" y="475488"/>
             <a:ext cx="3291840" cy="310896"/>
           </a:xfrm>
           <a:prstGeom prst="roundRect">
@@ -16653,7 +16653,7 @@
         </p:nvSpPr>
         <p:spPr>
           <a:xfrm>
-            <a:off x="8442655" y="384048"/>
+            <a:off x="8214055" y="475488"/>
             <a:ext cx="3291840" cy="310896"/>
           </a:xfrm>
           <a:prstGeom prst="rect">
@@ -16692,12 +16692,12 @@
         </p:nvSpPr>
         <p:spPr>
           <a:xfrm>
-            <a:off x="1301198" y="1790313"/>
-            <a:ext cx="2041579" cy="4328482"/>
+            <a:off x="1426997" y="1780346"/>
+            <a:ext cx="1835359" cy="3891261"/>
           </a:xfrm>
           <a:prstGeom prst="roundRect">
             <a:avLst>
-              <a:gd name="adj" fmla="val 13437"/>
+              <a:gd name="adj" fmla="val 14000"/>
             </a:avLst>
           </a:prstGeom>
           <a:solidFill>
@@ -16719,8 +16719,8 @@
         </p:nvSpPr>
         <p:spPr>
           <a:xfrm>
-            <a:off x="1392638" y="3680234"/>
-            <a:ext cx="1858699" cy="548640"/>
+            <a:off x="1518437" y="3451657"/>
+            <a:ext cx="1652479" cy="548640"/>
           </a:xfrm>
           <a:prstGeom prst="rect">
             <a:avLst/>
@@ -16783,8 +16783,8 @@
         </p:blipFill>
         <p:spPr>
           <a:xfrm>
-            <a:off x="1188720" y="1691640"/>
-            <a:ext cx="2263140" cy="4526280"/>
+            <a:off x="1325880" y="1691640"/>
+            <a:ext cx="2034540" cy="4069080"/>
           </a:xfrm>
           <a:prstGeom prst="rect">
             <a:avLst/>
@@ -16799,8 +16799,8 @@
         </p:nvSpPr>
         <p:spPr>
           <a:xfrm>
-            <a:off x="4549140" y="1737360"/>
-            <a:ext cx="4572000" cy="274320"/>
+            <a:off x="4366260" y="1691640"/>
+            <a:ext cx="7139635" cy="274320"/>
           </a:xfrm>
           <a:prstGeom prst="rect">
             <a:avLst/>
@@ -16838,7 +16838,7 @@
         </p:nvSpPr>
         <p:spPr>
           <a:xfrm>
-            <a:off x="4549140" y="2194560"/>
+            <a:off x="4366260" y="2194560"/>
             <a:ext cx="329184" cy="329184"/>
           </a:xfrm>
           <a:prstGeom prst="ellipse">
@@ -16863,7 +16863,7 @@
         </p:nvSpPr>
         <p:spPr>
           <a:xfrm>
-            <a:off x="4549140" y="2194560"/>
+            <a:off x="4366260" y="2194560"/>
             <a:ext cx="329184" cy="329184"/>
           </a:xfrm>
           <a:prstGeom prst="rect">
@@ -16902,8 +16902,8 @@
         </p:nvSpPr>
         <p:spPr>
           <a:xfrm>
-            <a:off x="5024628" y="2176272"/>
-            <a:ext cx="6709867" cy="292608"/>
+            <a:off x="4878324" y="2176272"/>
+            <a:ext cx="6627571" cy="292608"/>
           </a:xfrm>
           <a:prstGeom prst="rect">
             <a:avLst/>
@@ -16941,8 +16941,8 @@
         </p:nvSpPr>
         <p:spPr>
           <a:xfrm>
-            <a:off x="5024628" y="2505456"/>
-            <a:ext cx="6709867" cy="685800"/>
+            <a:off x="4878324" y="2523744"/>
+            <a:ext cx="6627571" cy="640080"/>
           </a:xfrm>
           <a:prstGeom prst="rect">
             <a:avLst/>
@@ -16966,7 +16966,7 @@
                 <a:ea typeface="Hanken Grotesk" pitchFamily="34" charset="-122"/>
                 <a:cs typeface="Hanken Grotesk" pitchFamily="34" charset="-120"/>
               </a:rPr>
-              <a:t>Deserunt mollit anim id est laborum curabitur pretium tincidunt lacus nulla gravida orci a odio.</a:t>
+              <a:t>Deserunt mollit anim id est laborum curabitur pretium tincidunt lacus nulla gravida.</a:t>
             </a:r>
             <a:endParaRPr lang="en-US" sz="1350" dirty="0"/>
           </a:p>
@@ -16980,7 +16980,7 @@
         </p:nvSpPr>
         <p:spPr>
           <a:xfrm>
-            <a:off x="4549140" y="3520440"/>
+            <a:off x="4366260" y="3383280"/>
             <a:ext cx="329184" cy="329184"/>
           </a:xfrm>
           <a:prstGeom prst="ellipse">
@@ -17005,7 +17005,7 @@
         </p:nvSpPr>
         <p:spPr>
           <a:xfrm>
-            <a:off x="4549140" y="3520440"/>
+            <a:off x="4366260" y="3383280"/>
             <a:ext cx="329184" cy="329184"/>
           </a:xfrm>
           <a:prstGeom prst="rect">
@@ -17044,8 +17044,8 @@
         </p:nvSpPr>
         <p:spPr>
           <a:xfrm>
-            <a:off x="5024628" y="3502152"/>
-            <a:ext cx="6709867" cy="292608"/>
+            <a:off x="4878324" y="3364992"/>
+            <a:ext cx="6627571" cy="292608"/>
           </a:xfrm>
           <a:prstGeom prst="rect">
             <a:avLst/>
@@ -17083,8 +17083,8 @@
         </p:nvSpPr>
         <p:spPr>
           <a:xfrm>
-            <a:off x="5024628" y="3831336"/>
-            <a:ext cx="6709867" cy="685800"/>
+            <a:off x="4878324" y="3712464"/>
+            <a:ext cx="6627571" cy="640080"/>
           </a:xfrm>
           <a:prstGeom prst="rect">
             <a:avLst/>
@@ -17108,7 +17108,7 @@
                 <a:ea typeface="Hanken Grotesk" pitchFamily="34" charset="-122"/>
                 <a:cs typeface="Hanken Grotesk" pitchFamily="34" charset="-120"/>
               </a:rPr>
-              <a:t>Amet consectetur adipiscing elit sed do eiusmod tempor incididunt ut labore et dolore magna aliqua.</a:t>
+              <a:t>Amet consectetur adipiscing elit sed do eiusmod tempor incididunt ut labore et.</a:t>
             </a:r>
             <a:endParaRPr lang="en-US" sz="1350" dirty="0"/>
           </a:p>
@@ -17122,7 +17122,7 @@
         </p:nvSpPr>
         <p:spPr>
           <a:xfrm>
-            <a:off x="4549140" y="4846320"/>
+            <a:off x="4366260" y="4572000"/>
             <a:ext cx="329184" cy="329184"/>
           </a:xfrm>
           <a:prstGeom prst="ellipse">
@@ -17147,7 +17147,7 @@
         </p:nvSpPr>
         <p:spPr>
           <a:xfrm>
-            <a:off x="4549140" y="4846320"/>
+            <a:off x="4366260" y="4572000"/>
             <a:ext cx="329184" cy="329184"/>
           </a:xfrm>
           <a:prstGeom prst="rect">
@@ -17186,8 +17186,8 @@
         </p:nvSpPr>
         <p:spPr>
           <a:xfrm>
-            <a:off x="5024628" y="4828032"/>
-            <a:ext cx="6709867" cy="292608"/>
+            <a:off x="4878324" y="4553712"/>
+            <a:ext cx="6627571" cy="292608"/>
           </a:xfrm>
           <a:prstGeom prst="rect">
             <a:avLst/>
@@ -17225,8 +17225,8 @@
         </p:nvSpPr>
         <p:spPr>
           <a:xfrm>
-            <a:off x="5024628" y="5157216"/>
-            <a:ext cx="6709867" cy="685800"/>
+            <a:off x="4878324" y="4901184"/>
+            <a:ext cx="6627571" cy="640080"/>
           </a:xfrm>
           <a:prstGeom prst="rect">
             <a:avLst/>
@@ -17250,7 +17250,7 @@
                 <a:ea typeface="Hanken Grotesk" pitchFamily="34" charset="-122"/>
                 <a:cs typeface="Hanken Grotesk" pitchFamily="34" charset="-120"/>
               </a:rPr>
-              <a:t>Cillum dolore eu fugiat nulla pariatur excepteur sint occaecat cupidatat non proident sunt in culpa.</a:t>
+              <a:t>Cillum dolore eu fugiat nulla pariatur excepteur sint occaecat cupidatat non proident.</a:t>
             </a:r>
             <a:endParaRPr lang="en-US" sz="1350" dirty="0"/>
           </a:p>
@@ -17264,8 +17264,8 @@
         </p:nvSpPr>
         <p:spPr>
           <a:xfrm>
-            <a:off x="4549140" y="5989320"/>
-            <a:ext cx="7185355" cy="274320"/>
+            <a:off x="4366260" y="5989320"/>
+            <a:ext cx="7139635" cy="274320"/>
           </a:xfrm>
           <a:prstGeom prst="rect">
             <a:avLst/>
